--- a/resources/year8/L12_Consolidation_and_Review_Weeks_1-3.pptx
+++ b/resources/year8/L12_Consolidation_and_Review_Weeks_1-3.pptx
@@ -14,7 +14,7 @@
     <p:sldId id="262" r:id="rId13"/>
     <p:sldId id="263" r:id="rId14"/>
   </p:sldIdLst>
-  <p:sldSz cx="12191695" cy="6858000" type="screen4x3"/>
+  <p:sldSz cx="12192000" cy="6858000" type="screen4x3"/>
   <p:notesSz cx="6858000" cy="9144000"/>
   <p:defaultTextStyle>
     <a:defPPr>
@@ -3120,19 +3120,12 @@
           <a:noFill/>
         </p:spPr>
         <p:txBody>
-          <a:bodyPr wrap="square" anchor="t" lIns="0" rIns="0" tIns="0" bIns="0">
-            <a:spAutoFit/>
-          </a:bodyPr>
-          <a:lstStyle/>
-          <a:p>
-            <a:pPr algn="l">
-              <a:spcBef>
-                <a:spcPts val="0"/>
-              </a:spcBef>
-              <a:spcAft>
-                <a:spcPts val="800"/>
-              </a:spcAft>
-            </a:pPr>
+          <a:bodyPr wrap="square">
+            <a:spAutoFit/>
+          </a:bodyPr>
+          <a:lstStyle/>
+          <a:p>
+            <a:pPr algn="l"/>
             <a:r>
               <a:rPr sz="1500" b="1" i="0">
                 <a:solidFill>
@@ -3162,19 +3155,12 @@
           <a:noFill/>
         </p:spPr>
         <p:txBody>
-          <a:bodyPr wrap="square" anchor="t" lIns="0" rIns="0" tIns="0" bIns="0">
-            <a:spAutoFit/>
-          </a:bodyPr>
-          <a:lstStyle/>
-          <a:p>
-            <a:pPr algn="r">
-              <a:spcBef>
-                <a:spcPts val="0"/>
-              </a:spcBef>
-              <a:spcAft>
-                <a:spcPts val="800"/>
-              </a:spcAft>
-            </a:pPr>
+          <a:bodyPr wrap="square">
+            <a:spAutoFit/>
+          </a:bodyPr>
+          <a:lstStyle/>
+          <a:p>
+            <a:pPr algn="r"/>
             <a:r>
               <a:rPr sz="1300" b="0" i="0">
                 <a:solidFill>
@@ -3204,19 +3190,12 @@
           <a:noFill/>
         </p:spPr>
         <p:txBody>
-          <a:bodyPr wrap="square" anchor="t" lIns="0" rIns="0" tIns="0" bIns="0">
-            <a:spAutoFit/>
-          </a:bodyPr>
-          <a:lstStyle/>
-          <a:p>
-            <a:pPr algn="l">
-              <a:spcBef>
-                <a:spcPts val="0"/>
-              </a:spcBef>
-              <a:spcAft>
-                <a:spcPts val="800"/>
-              </a:spcAft>
-            </a:pPr>
+          <a:bodyPr wrap="square">
+            <a:spAutoFit/>
+          </a:bodyPr>
+          <a:lstStyle/>
+          <a:p>
+            <a:pPr algn="l"/>
             <a:r>
               <a:rPr sz="3400" b="1" i="0">
                 <a:solidFill>
@@ -3246,21 +3225,14 @@
           <a:noFill/>
         </p:spPr>
         <p:txBody>
-          <a:bodyPr wrap="square" anchor="t" lIns="0" rIns="0" tIns="0" bIns="0">
-            <a:spAutoFit/>
-          </a:bodyPr>
-          <a:lstStyle/>
-          <a:p>
-            <a:pPr algn="l">
-              <a:spcBef>
-                <a:spcPts val="0"/>
-              </a:spcBef>
-              <a:spcAft>
-                <a:spcPts val="800"/>
-              </a:spcAft>
-            </a:pPr>
-            <a:r>
-              <a:rPr sz="1600" b="0" i="1">
+          <a:bodyPr wrap="square">
+            <a:spAutoFit/>
+          </a:bodyPr>
+          <a:lstStyle/>
+          <a:p>
+            <a:pPr algn="l"/>
+            <a:r>
+              <a:rPr sz="1600" b="0" i="0">
                 <a:solidFill>
                   <a:srgbClr val="595959"/>
                 </a:solidFill>
@@ -3288,21 +3260,14 @@
           <a:noFill/>
         </p:spPr>
         <p:txBody>
-          <a:bodyPr wrap="square" anchor="t" lIns="0" rIns="0" tIns="0" bIns="0">
-            <a:spAutoFit/>
-          </a:bodyPr>
-          <a:lstStyle/>
-          <a:p>
-            <a:pPr algn="l">
-              <a:spcBef>
-                <a:spcPts val="0"/>
-              </a:spcBef>
-              <a:spcAft>
-                <a:spcPts val="800"/>
-              </a:spcAft>
-            </a:pPr>
-            <a:r>
-              <a:rPr sz="1600" b="1" i="0">
+          <a:bodyPr wrap="square">
+            <a:spAutoFit/>
+          </a:bodyPr>
+          <a:lstStyle/>
+          <a:p>
+            <a:pPr algn="l"/>
+            <a:r>
+              <a:rPr sz="1500" b="1" i="0">
                 <a:solidFill>
                   <a:srgbClr val="595959"/>
                 </a:solidFill>
@@ -3330,19 +3295,12 @@
           <a:noFill/>
         </p:spPr>
         <p:txBody>
-          <a:bodyPr wrap="square" anchor="t" lIns="0" rIns="0" tIns="0" bIns="0">
-            <a:spAutoFit/>
-          </a:bodyPr>
-          <a:lstStyle/>
-          <a:p>
-            <a:pPr algn="l">
-              <a:spcBef>
-                <a:spcPts val="0"/>
-              </a:spcBef>
-              <a:spcAft>
-                <a:spcPts val="800"/>
-              </a:spcAft>
-            </a:pPr>
+          <a:bodyPr wrap="square">
+            <a:spAutoFit/>
+          </a:bodyPr>
+          <a:lstStyle/>
+          <a:p>
+            <a:pPr algn="l"/>
             <a:r>
               <a:rPr sz="2200" b="0" i="0">
                 <a:solidFill>
@@ -3350,7 +3308,7 @@
                 </a:solidFill>
                 <a:latin typeface="Arial"/>
               </a:rPr>
-              <a:t>1.  Solve: x + 9 = -2</a:t>
+              <a:t>1.  Find 65% of £140.</a:t>
             </a:r>
           </a:p>
         </p:txBody>
@@ -3372,19 +3330,12 @@
           <a:noFill/>
         </p:spPr>
         <p:txBody>
-          <a:bodyPr wrap="square" anchor="t" lIns="0" rIns="0" tIns="0" bIns="0">
-            <a:spAutoFit/>
-          </a:bodyPr>
-          <a:lstStyle/>
-          <a:p>
-            <a:pPr algn="l">
-              <a:spcBef>
-                <a:spcPts val="0"/>
-              </a:spcBef>
-              <a:spcAft>
-                <a:spcPts val="800"/>
-              </a:spcAft>
-            </a:pPr>
+          <a:bodyPr wrap="square">
+            <a:spAutoFit/>
+          </a:bodyPr>
+          <a:lstStyle/>
+          <a:p>
+            <a:pPr algn="l"/>
             <a:r>
               <a:rPr sz="2000" b="0" i="0">
                 <a:solidFill>
@@ -3392,7 +3343,7 @@
                 </a:solidFill>
                 <a:latin typeface="Arial"/>
               </a:rPr>
-              <a:t>x = -11</a:t>
+              <a:t>£91</a:t>
             </a:r>
           </a:p>
         </p:txBody>
@@ -3414,19 +3365,12 @@
           <a:noFill/>
         </p:spPr>
         <p:txBody>
-          <a:bodyPr wrap="square" anchor="t" lIns="0" rIns="0" tIns="0" bIns="0">
-            <a:spAutoFit/>
-          </a:bodyPr>
-          <a:lstStyle/>
-          <a:p>
-            <a:pPr algn="l">
-              <a:spcBef>
-                <a:spcPts val="0"/>
-              </a:spcBef>
-              <a:spcAft>
-                <a:spcPts val="800"/>
-              </a:spcAft>
-            </a:pPr>
+          <a:bodyPr wrap="square">
+            <a:spAutoFit/>
+          </a:bodyPr>
+          <a:lstStyle/>
+          <a:p>
+            <a:pPr algn="l"/>
             <a:r>
               <a:rPr sz="2200" b="0" i="0">
                 <a:solidFill>
@@ -3434,7 +3378,7 @@
                 </a:solidFill>
                 <a:latin typeface="Arial"/>
               </a:rPr>
-              <a:t>2.  Solve: 5x − 8 = 12</a:t>
+              <a:t>2.  New price £108 after an 8% increase. Find the original price.</a:t>
             </a:r>
           </a:p>
         </p:txBody>
@@ -3456,19 +3400,12 @@
           <a:noFill/>
         </p:spPr>
         <p:txBody>
-          <a:bodyPr wrap="square" anchor="t" lIns="0" rIns="0" tIns="0" bIns="0">
-            <a:spAutoFit/>
-          </a:bodyPr>
-          <a:lstStyle/>
-          <a:p>
-            <a:pPr algn="l">
-              <a:spcBef>
-                <a:spcPts val="0"/>
-              </a:spcBef>
-              <a:spcAft>
-                <a:spcPts val="800"/>
-              </a:spcAft>
-            </a:pPr>
+          <a:bodyPr wrap="square">
+            <a:spAutoFit/>
+          </a:bodyPr>
+          <a:lstStyle/>
+          <a:p>
+            <a:pPr algn="l"/>
             <a:r>
               <a:rPr sz="2000" b="0" i="0">
                 <a:solidFill>
@@ -3476,7 +3413,7 @@
                 </a:solidFill>
                 <a:latin typeface="Arial"/>
               </a:rPr>
-              <a:t>x = 4</a:t>
+              <a:t>£100</a:t>
             </a:r>
           </a:p>
         </p:txBody>
@@ -3498,19 +3435,12 @@
           <a:noFill/>
         </p:spPr>
         <p:txBody>
-          <a:bodyPr wrap="square" anchor="t" lIns="0" rIns="0" tIns="0" bIns="0">
-            <a:spAutoFit/>
-          </a:bodyPr>
-          <a:lstStyle/>
-          <a:p>
-            <a:pPr algn="l">
-              <a:spcBef>
-                <a:spcPts val="0"/>
-              </a:spcBef>
-              <a:spcAft>
-                <a:spcPts val="800"/>
-              </a:spcAft>
-            </a:pPr>
+          <a:bodyPr wrap="square">
+            <a:spAutoFit/>
+          </a:bodyPr>
+          <a:lstStyle/>
+          <a:p>
+            <a:pPr algn="l"/>
             <a:r>
               <a:rPr sz="2200" b="0" i="0">
                 <a:solidFill>
@@ -3518,7 +3448,7 @@
                 </a:solidFill>
                 <a:latin typeface="Arial"/>
               </a:rPr>
-              <a:t>3.  Solve: 3(x + 2) = 21</a:t>
+              <a:t>3.  A price rises from £64 to £72. Find the percentage increase.</a:t>
             </a:r>
           </a:p>
         </p:txBody>
@@ -3540,19 +3470,12 @@
           <a:noFill/>
         </p:spPr>
         <p:txBody>
-          <a:bodyPr wrap="square" anchor="t" lIns="0" rIns="0" tIns="0" bIns="0">
-            <a:spAutoFit/>
-          </a:bodyPr>
-          <a:lstStyle/>
-          <a:p>
-            <a:pPr algn="l">
-              <a:spcBef>
-                <a:spcPts val="0"/>
-              </a:spcBef>
-              <a:spcAft>
-                <a:spcPts val="800"/>
-              </a:spcAft>
-            </a:pPr>
+          <a:bodyPr wrap="square">
+            <a:spAutoFit/>
+          </a:bodyPr>
+          <a:lstStyle/>
+          <a:p>
+            <a:pPr algn="l"/>
             <a:r>
               <a:rPr sz="2000" b="0" i="0">
                 <a:solidFill>
@@ -3560,7 +3483,7 @@
                 </a:solidFill>
                 <a:latin typeface="Arial"/>
               </a:rPr>
-              <a:t>x = 5</a:t>
+              <a:t>12.5%</a:t>
             </a:r>
           </a:p>
         </p:txBody>
@@ -3582,19 +3505,12 @@
           <a:noFill/>
         </p:spPr>
         <p:txBody>
-          <a:bodyPr wrap="square" anchor="t" lIns="0" rIns="0" tIns="0" bIns="0">
-            <a:spAutoFit/>
-          </a:bodyPr>
-          <a:lstStyle/>
-          <a:p>
-            <a:pPr algn="l">
-              <a:spcBef>
-                <a:spcPts val="0"/>
-              </a:spcBef>
-              <a:spcAft>
-                <a:spcPts val="800"/>
-              </a:spcAft>
-            </a:pPr>
+          <a:bodyPr wrap="square">
+            <a:spAutoFit/>
+          </a:bodyPr>
+          <a:lstStyle/>
+          <a:p>
+            <a:pPr algn="l"/>
             <a:r>
               <a:rPr sz="2200" b="0" i="0">
                 <a:solidFill>
@@ -3602,7 +3518,7 @@
                 </a:solidFill>
                 <a:latin typeface="Arial"/>
               </a:rPr>
-              <a:t>4.  Solve: -2(x − 1) = 10</a:t>
+              <a:t>4.  £500 at 4% simple interest for 3 years. Find the total.</a:t>
             </a:r>
           </a:p>
         </p:txBody>
@@ -3624,19 +3540,12 @@
           <a:noFill/>
         </p:spPr>
         <p:txBody>
-          <a:bodyPr wrap="square" anchor="t" lIns="0" rIns="0" tIns="0" bIns="0">
-            <a:spAutoFit/>
-          </a:bodyPr>
-          <a:lstStyle/>
-          <a:p>
-            <a:pPr algn="l">
-              <a:spcBef>
-                <a:spcPts val="0"/>
-              </a:spcBef>
-              <a:spcAft>
-                <a:spcPts val="800"/>
-              </a:spcAft>
-            </a:pPr>
+          <a:bodyPr wrap="square">
+            <a:spAutoFit/>
+          </a:bodyPr>
+          <a:lstStyle/>
+          <a:p>
+            <a:pPr algn="l"/>
             <a:r>
               <a:rPr sz="2000" b="0" i="0">
                 <a:solidFill>
@@ -3644,7 +3553,7 @@
                 </a:solidFill>
                 <a:latin typeface="Arial"/>
               </a:rPr>
-              <a:t>x = -4</a:t>
+              <a:t>£560</a:t>
             </a:r>
           </a:p>
         </p:txBody>
@@ -3666,19 +3575,12 @@
           <a:noFill/>
         </p:spPr>
         <p:txBody>
-          <a:bodyPr wrap="square" anchor="t" lIns="0" rIns="0" tIns="0" bIns="0">
-            <a:spAutoFit/>
-          </a:bodyPr>
-          <a:lstStyle/>
-          <a:p>
-            <a:pPr algn="l">
-              <a:spcBef>
-                <a:spcPts val="0"/>
-              </a:spcBef>
-              <a:spcAft>
-                <a:spcPts val="800"/>
-              </a:spcAft>
-            </a:pPr>
+          <a:bodyPr wrap="square">
+            <a:spAutoFit/>
+          </a:bodyPr>
+          <a:lstStyle/>
+          <a:p>
+            <a:pPr algn="l"/>
             <a:r>
               <a:rPr sz="2200" b="0" i="0">
                 <a:solidFill>
@@ -3686,7 +3588,7 @@
                 </a:solidFill>
                 <a:latin typeface="Arial"/>
               </a:rPr>
-              <a:t>5.  Solve: x ÷ 4 + 3 = 5</a:t>
+              <a:t>5.  £400 at 10% compound interest for 2 years.</a:t>
             </a:r>
           </a:p>
         </p:txBody>
@@ -3708,19 +3610,12 @@
           <a:noFill/>
         </p:spPr>
         <p:txBody>
-          <a:bodyPr wrap="square" anchor="t" lIns="0" rIns="0" tIns="0" bIns="0">
-            <a:spAutoFit/>
-          </a:bodyPr>
-          <a:lstStyle/>
-          <a:p>
-            <a:pPr algn="l">
-              <a:spcBef>
-                <a:spcPts val="0"/>
-              </a:spcBef>
-              <a:spcAft>
-                <a:spcPts val="800"/>
-              </a:spcAft>
-            </a:pPr>
+          <a:bodyPr wrap="square">
+            <a:spAutoFit/>
+          </a:bodyPr>
+          <a:lstStyle/>
+          <a:p>
+            <a:pPr algn="l"/>
             <a:r>
               <a:rPr sz="2000" b="0" i="0">
                 <a:solidFill>
@@ -3728,7 +3623,7 @@
                 </a:solidFill>
                 <a:latin typeface="Arial"/>
               </a:rPr>
-              <a:t>x = 8</a:t>
+              <a:t>£484</a:t>
             </a:r>
           </a:p>
         </p:txBody>
@@ -3750,19 +3645,12 @@
           <a:noFill/>
         </p:spPr>
         <p:txBody>
-          <a:bodyPr wrap="square" anchor="t" lIns="0" rIns="0" tIns="0" bIns="0">
-            <a:spAutoFit/>
-          </a:bodyPr>
-          <a:lstStyle/>
-          <a:p>
-            <a:pPr algn="l">
-              <a:spcBef>
-                <a:spcPts val="0"/>
-              </a:spcBef>
-              <a:spcAft>
-                <a:spcPts val="800"/>
-              </a:spcAft>
-            </a:pPr>
+          <a:bodyPr wrap="square">
+            <a:spAutoFit/>
+          </a:bodyPr>
+          <a:lstStyle/>
+          <a:p>
+            <a:pPr algn="l"/>
             <a:r>
               <a:rPr sz="1100" b="0" i="0">
                 <a:solidFill>
@@ -3770,7 +3658,7 @@
                 </a:solidFill>
                 <a:latin typeface="Arial"/>
               </a:rPr>
-              <a:t>Y8 Solving Linear Equations — Lower-to-Middle Set</a:t>
+              <a:t>Y8 Percentages and Proportionality — Middle Set</a:t>
             </a:r>
           </a:p>
         </p:txBody>
@@ -3818,275 +3706,231 @@
           <a:noFill/>
         </p:spPr>
         <p:txBody>
-          <a:bodyPr wrap="square" anchor="t" lIns="0" rIns="0" tIns="0" bIns="0">
+          <a:bodyPr wrap="square">
+            <a:spAutoFit/>
+          </a:bodyPr>
+          <a:lstStyle/>
+          <a:p>
+            <a:pPr algn="l"/>
+            <a:r>
+              <a:rPr sz="1500" b="1" i="0">
+                <a:solidFill>
+                  <a:srgbClr val="595959"/>
+                </a:solidFill>
+                <a:latin typeface="Arial"/>
+              </a:rPr>
+              <a:t>WEEK 3 · LESSON 4 OF 4</a:t>
+            </a:r>
+          </a:p>
+        </p:txBody>
+      </p:sp>
+      <p:sp>
+        <p:nvSpPr>
+          <p:cNvPr id="3" name="TextBox 2"/>
+          <p:cNvSpPr txBox="1"/>
+          <p:nvPr/>
+        </p:nvSpPr>
+        <p:spPr>
+          <a:xfrm>
+            <a:off x="7619695" y="256032"/>
+            <a:ext cx="4114800" cy="365760"/>
+          </a:xfrm>
+          <a:prstGeom prst="rect">
+            <a:avLst/>
+          </a:prstGeom>
+          <a:noFill/>
+        </p:spPr>
+        <p:txBody>
+          <a:bodyPr wrap="square">
+            <a:spAutoFit/>
+          </a:bodyPr>
+          <a:lstStyle/>
+          <a:p>
+            <a:pPr algn="r"/>
+            <a:r>
+              <a:rPr sz="1300" b="0" i="0">
+                <a:solidFill>
+                  <a:srgbClr val="595959"/>
+                </a:solidFill>
+                <a:latin typeface="Arial"/>
+              </a:rPr>
+              <a:t>L12</a:t>
+            </a:r>
+          </a:p>
+        </p:txBody>
+      </p:sp>
+      <p:sp>
+        <p:nvSpPr>
+          <p:cNvPr id="4" name="TextBox 3"/>
+          <p:cNvSpPr txBox="1"/>
+          <p:nvPr/>
+        </p:nvSpPr>
+        <p:spPr>
+          <a:xfrm>
+            <a:off x="457200" y="868680"/>
+            <a:ext cx="7772400" cy="365760"/>
+          </a:xfrm>
+          <a:prstGeom prst="rect">
+            <a:avLst/>
+          </a:prstGeom>
+          <a:noFill/>
+        </p:spPr>
+        <p:txBody>
+          <a:bodyPr wrap="square">
+            <a:spAutoFit/>
+          </a:bodyPr>
+          <a:lstStyle/>
+          <a:p>
+            <a:pPr algn="l"/>
+            <a:r>
+              <a:rPr sz="1600" b="0" i="0">
+                <a:solidFill>
+                  <a:srgbClr val="595959"/>
+                </a:solidFill>
+                <a:latin typeface="Arial"/>
+              </a:rPr>
+              <a:t>Date: _______________________</a:t>
+            </a:r>
+          </a:p>
+        </p:txBody>
+      </p:sp>
+      <p:sp>
+        <p:nvSpPr>
+          <p:cNvPr id="5" name="TextBox 4"/>
+          <p:cNvSpPr txBox="1"/>
+          <p:nvPr/>
+        </p:nvSpPr>
+        <p:spPr>
+          <a:xfrm>
+            <a:off x="457200" y="1417320"/>
+            <a:ext cx="11277295" cy="1188720"/>
+          </a:xfrm>
+          <a:prstGeom prst="rect">
+            <a:avLst/>
+          </a:prstGeom>
+          <a:noFill/>
+        </p:spPr>
+        <p:txBody>
+          <a:bodyPr wrap="square">
+            <a:spAutoFit/>
+          </a:bodyPr>
+          <a:lstStyle/>
+          <a:p>
+            <a:pPr algn="l"/>
+            <a:r>
+              <a:rPr sz="3800" b="1" i="0">
+                <a:solidFill>
+                  <a:srgbClr val="000000"/>
+                </a:solidFill>
+                <a:latin typeface="Arial"/>
+              </a:rPr>
+              <a:t>Consolidation and Review (Weeks 1–3)</a:t>
+            </a:r>
+          </a:p>
+        </p:txBody>
+      </p:sp>
+      <p:sp>
+        <p:nvSpPr>
+          <p:cNvPr id="6" name="TextBox 5"/>
+          <p:cNvSpPr txBox="1"/>
+          <p:nvPr/>
+        </p:nvSpPr>
+        <p:spPr>
+          <a:xfrm>
+            <a:off x="457200" y="2788920"/>
+            <a:ext cx="6949440" cy="365760"/>
+          </a:xfrm>
+          <a:prstGeom prst="rect">
+            <a:avLst/>
+          </a:prstGeom>
+          <a:noFill/>
+        </p:spPr>
+        <p:txBody>
+          <a:bodyPr wrap="square">
+            <a:spAutoFit/>
+          </a:bodyPr>
+          <a:lstStyle/>
+          <a:p>
+            <a:pPr algn="l"/>
+            <a:r>
+              <a:rPr sz="2000" b="1" i="0">
+                <a:solidFill>
+                  <a:srgbClr val="000000"/>
+                </a:solidFill>
+                <a:latin typeface="Arial"/>
+              </a:rPr>
+              <a:t>Learning Objectives</a:t>
+            </a:r>
+          </a:p>
+        </p:txBody>
+      </p:sp>
+      <p:sp>
+        <p:nvSpPr>
+          <p:cNvPr id="7" name="TextBox 6"/>
+          <p:cNvSpPr txBox="1"/>
+          <p:nvPr/>
+        </p:nvSpPr>
+        <p:spPr>
+          <a:xfrm>
+            <a:off x="457200" y="3246120"/>
+            <a:ext cx="6949440" cy="1645920"/>
+          </a:xfrm>
+          <a:prstGeom prst="rect">
+            <a:avLst/>
+          </a:prstGeom>
+          <a:noFill/>
+        </p:spPr>
+        <p:txBody>
+          <a:bodyPr wrap="square">
             <a:spAutoFit/>
           </a:bodyPr>
           <a:lstStyle/>
           <a:p>
             <a:pPr algn="l">
-              <a:spcBef>
-                <a:spcPts val="0"/>
-              </a:spcBef>
               <a:spcAft>
                 <a:spcPts val="800"/>
               </a:spcAft>
             </a:pPr>
             <a:r>
-              <a:rPr sz="1500" b="1" i="0">
-                <a:solidFill>
-                  <a:srgbClr val="595959"/>
-                </a:solidFill>
-                <a:latin typeface="Arial"/>
-              </a:rPr>
-              <a:t>WEEK 3 · LESSON 4 OF 4</a:t>
-            </a:r>
-          </a:p>
-        </p:txBody>
-      </p:sp>
-      <p:sp>
-        <p:nvSpPr>
-          <p:cNvPr id="3" name="TextBox 2"/>
-          <p:cNvSpPr txBox="1"/>
-          <p:nvPr/>
-        </p:nvSpPr>
-        <p:spPr>
-          <a:xfrm>
-            <a:off x="7619695" y="256032"/>
-            <a:ext cx="4114800" cy="365760"/>
-          </a:xfrm>
-          <a:prstGeom prst="rect">
-            <a:avLst/>
-          </a:prstGeom>
-          <a:noFill/>
-        </p:spPr>
-        <p:txBody>
-          <a:bodyPr wrap="square" anchor="t" lIns="0" rIns="0" tIns="0" bIns="0">
-            <a:spAutoFit/>
-          </a:bodyPr>
-          <a:lstStyle/>
-          <a:p>
-            <a:pPr algn="r">
-              <a:spcBef>
-                <a:spcPts val="0"/>
-              </a:spcBef>
+              <a:rPr sz="2200" b="0">
+                <a:solidFill>
+                  <a:srgbClr val="000000"/>
+                </a:solidFill>
+                <a:latin typeface="Arial"/>
+              </a:rPr>
+              <a:t>-  Apply percentage skills to varied real-life contexts</a:t>
+            </a:r>
+          </a:p>
+          <a:p>
+            <a:pPr algn="l">
               <a:spcAft>
                 <a:spcPts val="800"/>
               </a:spcAft>
             </a:pPr>
             <a:r>
-              <a:rPr sz="1300" b="0" i="0">
-                <a:solidFill>
-                  <a:srgbClr val="595959"/>
-                </a:solidFill>
-                <a:latin typeface="Arial"/>
-              </a:rPr>
-              <a:t>L12</a:t>
-            </a:r>
-          </a:p>
-        </p:txBody>
-      </p:sp>
-      <p:sp>
-        <p:nvSpPr>
-          <p:cNvPr id="4" name="TextBox 3"/>
-          <p:cNvSpPr txBox="1"/>
-          <p:nvPr/>
-        </p:nvSpPr>
-        <p:spPr>
-          <a:xfrm>
-            <a:off x="457200" y="868680"/>
-            <a:ext cx="7772400" cy="365760"/>
-          </a:xfrm>
-          <a:prstGeom prst="rect">
-            <a:avLst/>
-          </a:prstGeom>
-          <a:noFill/>
-        </p:spPr>
-        <p:txBody>
-          <a:bodyPr wrap="square" anchor="t" lIns="0" rIns="0" tIns="0" bIns="0">
-            <a:spAutoFit/>
-          </a:bodyPr>
-          <a:lstStyle/>
+              <a:rPr sz="2200" b="0">
+                <a:solidFill>
+                  <a:srgbClr val="000000"/>
+                </a:solidFill>
+                <a:latin typeface="Arial"/>
+              </a:rPr>
+              <a:t>-  Choose the correct method: direct %, multiplier, reverse, or interest</a:t>
+            </a:r>
+          </a:p>
           <a:p>
             <a:pPr algn="l">
-              <a:spcBef>
-                <a:spcPts val="0"/>
-              </a:spcBef>
               <a:spcAft>
                 <a:spcPts val="800"/>
               </a:spcAft>
             </a:pPr>
             <a:r>
-              <a:rPr sz="1600" b="0" i="0">
-                <a:solidFill>
-                  <a:srgbClr val="595959"/>
-                </a:solidFill>
-                <a:latin typeface="Arial"/>
-              </a:rPr>
-              <a:t>Date: _______________________</a:t>
-            </a:r>
-          </a:p>
-        </p:txBody>
-      </p:sp>
-      <p:sp>
-        <p:nvSpPr>
-          <p:cNvPr id="5" name="TextBox 4"/>
-          <p:cNvSpPr txBox="1"/>
-          <p:nvPr/>
-        </p:nvSpPr>
-        <p:spPr>
-          <a:xfrm>
-            <a:off x="457200" y="1417320"/>
-            <a:ext cx="11277295" cy="1188720"/>
-          </a:xfrm>
-          <a:prstGeom prst="rect">
-            <a:avLst/>
-          </a:prstGeom>
-          <a:noFill/>
-        </p:spPr>
-        <p:txBody>
-          <a:bodyPr wrap="square" anchor="ctr" lIns="0" rIns="0" tIns="0" bIns="0">
-            <a:spAutoFit/>
-          </a:bodyPr>
-          <a:lstStyle/>
-          <a:p>
-            <a:pPr algn="l">
-              <a:spcBef>
-                <a:spcPts val="0"/>
-              </a:spcBef>
-              <a:spcAft>
-                <a:spcPts val="800"/>
-              </a:spcAft>
-            </a:pPr>
-            <a:r>
-              <a:rPr sz="3800" b="1" i="0">
+              <a:rPr sz="2200" b="0">
                 <a:solidFill>
                   <a:srgbClr val="000000"/>
                 </a:solidFill>
                 <a:latin typeface="Arial"/>
               </a:rPr>
-              <a:t>Consolidation and Review (Weeks 1-3)</a:t>
-            </a:r>
-          </a:p>
-        </p:txBody>
-      </p:sp>
-      <p:sp>
-        <p:nvSpPr>
-          <p:cNvPr id="6" name="TextBox 5"/>
-          <p:cNvSpPr txBox="1"/>
-          <p:nvPr/>
-        </p:nvSpPr>
-        <p:spPr>
-          <a:xfrm>
-            <a:off x="457200" y="2788920"/>
-            <a:ext cx="6949440" cy="365760"/>
-          </a:xfrm>
-          <a:prstGeom prst="rect">
-            <a:avLst/>
-          </a:prstGeom>
-          <a:noFill/>
-        </p:spPr>
-        <p:txBody>
-          <a:bodyPr wrap="square" anchor="t" lIns="0" rIns="0" tIns="0" bIns="0">
-            <a:spAutoFit/>
-          </a:bodyPr>
-          <a:lstStyle/>
-          <a:p>
-            <a:pPr algn="l">
-              <a:spcBef>
-                <a:spcPts val="0"/>
-              </a:spcBef>
-              <a:spcAft>
-                <a:spcPts val="800"/>
-              </a:spcAft>
-            </a:pPr>
-            <a:r>
-              <a:rPr sz="2000" b="1" i="0">
-                <a:solidFill>
-                  <a:srgbClr val="000000"/>
-                </a:solidFill>
-                <a:latin typeface="Arial"/>
-              </a:rPr>
-              <a:t>Learning Objectives</a:t>
-            </a:r>
-          </a:p>
-        </p:txBody>
-      </p:sp>
-      <p:sp>
-        <p:nvSpPr>
-          <p:cNvPr id="7" name="TextBox 6"/>
-          <p:cNvSpPr txBox="1"/>
-          <p:nvPr/>
-        </p:nvSpPr>
-        <p:spPr>
-          <a:xfrm>
-            <a:off x="457200" y="3246120"/>
-            <a:ext cx="6949440" cy="1645920"/>
-          </a:xfrm>
-          <a:prstGeom prst="rect">
-            <a:avLst/>
-          </a:prstGeom>
-          <a:noFill/>
-        </p:spPr>
-        <p:txBody>
-          <a:bodyPr wrap="square" anchor="t" lIns="0" rIns="0" tIns="0" bIns="0">
-            <a:spAutoFit/>
-          </a:bodyPr>
-          <a:lstStyle/>
-          <a:p>
-            <a:pPr algn="l">
-              <a:spcBef>
-                <a:spcPts val="0"/>
-              </a:spcBef>
-              <a:spcAft>
-                <a:spcPts val="1000"/>
-              </a:spcAft>
-            </a:pPr>
-            <a:r>
-              <a:rPr sz="2200" b="0" i="0">
-                <a:solidFill>
-                  <a:srgbClr val="000000"/>
-                </a:solidFill>
-                <a:latin typeface="Arial"/>
-              </a:rPr>
-              <a:t>-  Consolidate one-step, two-step, and bracket equations</a:t>
-            </a:r>
-          </a:p>
-          <a:p>
-            <a:pPr algn="l">
-              <a:spcBef>
-                <a:spcPts val="0"/>
-              </a:spcBef>
-              <a:spcAft>
-                <a:spcPts val="1000"/>
-              </a:spcAft>
-            </a:pPr>
-            <a:r>
-              <a:rPr sz="2200" b="0" i="0">
-                <a:solidFill>
-                  <a:srgbClr val="000000"/>
-                </a:solidFill>
-                <a:latin typeface="Arial"/>
-              </a:rPr>
-              <a:t>-  Identify which 'family' of equation a question belongs to before solving</a:t>
-            </a:r>
-          </a:p>
-          <a:p>
-            <a:pPr algn="l">
-              <a:spcBef>
-                <a:spcPts val="0"/>
-              </a:spcBef>
-              <a:spcAft>
-                <a:spcPts val="1000"/>
-              </a:spcAft>
-            </a:pPr>
-            <a:r>
-              <a:rPr sz="2200" b="0" i="0">
-                <a:solidFill>
-                  <a:srgbClr val="000000"/>
-                </a:solidFill>
-                <a:latin typeface="Arial"/>
-              </a:rPr>
-              <a:t>-  Build overall confidence ahead of the final stage (unknowns on both sides)</a:t>
+              <a:t>-  Communicate mathematical reasoning clearly</a:t>
             </a:r>
           </a:p>
         </p:txBody>
@@ -4108,19 +3952,12 @@
           <a:noFill/>
         </p:spPr>
         <p:txBody>
-          <a:bodyPr wrap="square" anchor="t" lIns="0" rIns="0" tIns="0" bIns="0">
-            <a:spAutoFit/>
-          </a:bodyPr>
-          <a:lstStyle/>
-          <a:p>
-            <a:pPr algn="l">
-              <a:spcBef>
-                <a:spcPts val="0"/>
-              </a:spcBef>
-              <a:spcAft>
-                <a:spcPts val="800"/>
-              </a:spcAft>
-            </a:pPr>
+          <a:bodyPr wrap="square">
+            <a:spAutoFit/>
+          </a:bodyPr>
+          <a:lstStyle/>
+          <a:p>
+            <a:pPr algn="l"/>
             <a:r>
               <a:rPr sz="2000" b="1" i="0">
                 <a:solidFill>
@@ -4155,7 +3992,6 @@
               <a:srgbClr val="CCCCCC"/>
             </a:solidFill>
           </a:ln>
-          <a:effectLst/>
         </p:spPr>
         <p:style>
           <a:lnRef idx="1">
@@ -4172,18 +4008,18 @@
           </a:fontRef>
         </p:style>
         <p:txBody>
-          <a:bodyPr rtlCol="0" anchor="ctr" wrap="square" lIns="109728" rIns="109728" tIns="18288" bIns="18288"/>
+          <a:bodyPr rtlCol="0" anchor="ctr" wrap="square"/>
           <a:lstStyle/>
           <a:p>
             <a:pPr algn="ctr"/>
             <a:r>
-              <a:rPr sz="1500" b="1" i="0">
+              <a:rPr sz="1500" b="1">
                 <a:solidFill>
                   <a:srgbClr val="000000"/>
                 </a:solidFill>
                 <a:latin typeface="Arial"/>
               </a:rPr>
-              <a:t>Consolidation</a:t>
+              <a:t>Real-life</a:t>
             </a:r>
           </a:p>
         </p:txBody>
@@ -4196,7 +4032,7 @@
         </p:nvSpPr>
         <p:spPr>
           <a:xfrm>
-            <a:off x="8229600" y="3858768"/>
+            <a:off x="8229600" y="3758780"/>
             <a:ext cx="3291840" cy="438912"/>
           </a:xfrm>
           <a:prstGeom prst="roundRect">
@@ -4210,7 +4046,6 @@
               <a:srgbClr val="CCCCCC"/>
             </a:solidFill>
           </a:ln>
-          <a:effectLst/>
         </p:spPr>
         <p:style>
           <a:lnRef idx="1">
@@ -4227,18 +4062,18 @@
           </a:fontRef>
         </p:style>
         <p:txBody>
-          <a:bodyPr rtlCol="0" anchor="ctr" wrap="square" lIns="109728" rIns="109728" tIns="18288" bIns="18288"/>
+          <a:bodyPr rtlCol="0" anchor="ctr" wrap="square"/>
           <a:lstStyle/>
           <a:p>
             <a:pPr algn="ctr"/>
             <a:r>
-              <a:rPr sz="1500" b="1" i="0">
+              <a:rPr sz="1500" b="1">
                 <a:solidFill>
                   <a:srgbClr val="000000"/>
                 </a:solidFill>
                 <a:latin typeface="Arial"/>
               </a:rPr>
-              <a:t>Review</a:t>
+              <a:t>VAT</a:t>
             </a:r>
           </a:p>
         </p:txBody>
@@ -4251,7 +4086,7 @@
         </p:nvSpPr>
         <p:spPr>
           <a:xfrm>
-            <a:off x="8229600" y="4425696"/>
+            <a:off x="8229600" y="4225720"/>
             <a:ext cx="3291840" cy="438912"/>
           </a:xfrm>
           <a:prstGeom prst="roundRect">
@@ -4265,7 +4100,6 @@
               <a:srgbClr val="CCCCCC"/>
             </a:solidFill>
           </a:ln>
-          <a:effectLst/>
         </p:spPr>
         <p:style>
           <a:lnRef idx="1">
@@ -4282,25 +4116,133 @@
           </a:fontRef>
         </p:style>
         <p:txBody>
-          <a:bodyPr rtlCol="0" anchor="ctr" wrap="square" lIns="109728" rIns="109728" tIns="18288" bIns="18288"/>
+          <a:bodyPr rtlCol="0" anchor="ctr" wrap="square"/>
           <a:lstStyle/>
           <a:p>
             <a:pPr algn="ctr"/>
             <a:r>
-              <a:rPr sz="1500" b="1" i="0">
+              <a:rPr sz="1500" b="1">
                 <a:solidFill>
                   <a:srgbClr val="000000"/>
                 </a:solidFill>
                 <a:latin typeface="Arial"/>
               </a:rPr>
-              <a:t>Equation families</a:t>
-            </a:r>
-          </a:p>
-        </p:txBody>
-      </p:sp>
-      <p:sp>
-        <p:nvSpPr>
-          <p:cNvPr id="12" name="TextBox 11"/>
+              <a:t>Discount</a:t>
+            </a:r>
+          </a:p>
+        </p:txBody>
+      </p:sp>
+      <p:sp>
+        <p:nvSpPr>
+          <p:cNvPr id="12" name="Rounded Rectangle 11"/>
+          <p:cNvSpPr/>
+          <p:nvPr/>
+        </p:nvSpPr>
+        <p:spPr>
+          <a:xfrm>
+            <a:off x="8229600" y="4692660"/>
+            <a:ext cx="3291840" cy="438912"/>
+          </a:xfrm>
+          <a:prstGeom prst="roundRect">
+            <a:avLst/>
+          </a:prstGeom>
+          <a:solidFill>
+            <a:srgbClr val="F2F2F2"/>
+          </a:solidFill>
+          <a:ln w="9525">
+            <a:solidFill>
+              <a:srgbClr val="CCCCCC"/>
+            </a:solidFill>
+          </a:ln>
+        </p:spPr>
+        <p:style>
+          <a:lnRef idx="1">
+            <a:schemeClr val="accent1"/>
+          </a:lnRef>
+          <a:fillRef idx="3">
+            <a:schemeClr val="accent1"/>
+          </a:fillRef>
+          <a:effectRef idx="2">
+            <a:schemeClr val="accent1"/>
+          </a:effectRef>
+          <a:fontRef idx="minor">
+            <a:schemeClr val="lt1"/>
+          </a:fontRef>
+        </p:style>
+        <p:txBody>
+          <a:bodyPr rtlCol="0" anchor="ctr" wrap="square"/>
+          <a:lstStyle/>
+          <a:p>
+            <a:pPr algn="ctr"/>
+            <a:r>
+              <a:rPr sz="1500" b="1">
+                <a:solidFill>
+                  <a:srgbClr val="000000"/>
+                </a:solidFill>
+                <a:latin typeface="Arial"/>
+              </a:rPr>
+              <a:t>Wage</a:t>
+            </a:r>
+          </a:p>
+        </p:txBody>
+      </p:sp>
+      <p:sp>
+        <p:nvSpPr>
+          <p:cNvPr id="13" name="Rounded Rectangle 12"/>
+          <p:cNvSpPr/>
+          <p:nvPr/>
+        </p:nvSpPr>
+        <p:spPr>
+          <a:xfrm>
+            <a:off x="8229600" y="5159600"/>
+            <a:ext cx="3291840" cy="438912"/>
+          </a:xfrm>
+          <a:prstGeom prst="roundRect">
+            <a:avLst/>
+          </a:prstGeom>
+          <a:solidFill>
+            <a:srgbClr val="F2F2F2"/>
+          </a:solidFill>
+          <a:ln w="9525">
+            <a:solidFill>
+              <a:srgbClr val="CCCCCC"/>
+            </a:solidFill>
+          </a:ln>
+        </p:spPr>
+        <p:style>
+          <a:lnRef idx="1">
+            <a:schemeClr val="accent1"/>
+          </a:lnRef>
+          <a:fillRef idx="3">
+            <a:schemeClr val="accent1"/>
+          </a:fillRef>
+          <a:effectRef idx="2">
+            <a:schemeClr val="accent1"/>
+          </a:effectRef>
+          <a:fontRef idx="minor">
+            <a:schemeClr val="lt1"/>
+          </a:fontRef>
+        </p:style>
+        <p:txBody>
+          <a:bodyPr rtlCol="0" anchor="ctr" wrap="square"/>
+          <a:lstStyle/>
+          <a:p>
+            <a:pPr algn="ctr"/>
+            <a:r>
+              <a:rPr sz="1500" b="1">
+                <a:solidFill>
+                  <a:srgbClr val="000000"/>
+                </a:solidFill>
+                <a:latin typeface="Arial"/>
+              </a:rPr>
+              <a:t>Interest</a:t>
+            </a:r>
+          </a:p>
+        </p:txBody>
+      </p:sp>
+      <p:sp>
+        <p:nvSpPr>
+          <p:cNvPr id="14" name="TextBox 13"/>
           <p:cNvSpPr txBox="1"/>
           <p:nvPr/>
         </p:nvSpPr>
@@ -4315,19 +4257,12 @@
           <a:noFill/>
         </p:spPr>
         <p:txBody>
-          <a:bodyPr wrap="square" anchor="t" lIns="0" rIns="0" tIns="0" bIns="0">
-            <a:spAutoFit/>
-          </a:bodyPr>
-          <a:lstStyle/>
-          <a:p>
-            <a:pPr algn="l">
-              <a:spcBef>
-                <a:spcPts val="0"/>
-              </a:spcBef>
-              <a:spcAft>
-                <a:spcPts val="800"/>
-              </a:spcAft>
-            </a:pPr>
+          <a:bodyPr wrap="square">
+            <a:spAutoFit/>
+          </a:bodyPr>
+          <a:lstStyle/>
+          <a:p>
+            <a:pPr algn="l"/>
             <a:r>
               <a:rPr sz="1100" b="0" i="0">
                 <a:solidFill>
@@ -4335,7 +4270,7 @@
                 </a:solidFill>
                 <a:latin typeface="Arial"/>
               </a:rPr>
-              <a:t>Y8 Solving Linear Equations — Lower-to-Middle Set</a:t>
+              <a:t>Y8 Percentages and Proportionality — Middle Set</a:t>
             </a:r>
           </a:p>
         </p:txBody>
@@ -4383,19 +4318,12 @@
           <a:noFill/>
         </p:spPr>
         <p:txBody>
-          <a:bodyPr wrap="square" anchor="t" lIns="0" rIns="0" tIns="0" bIns="0">
-            <a:spAutoFit/>
-          </a:bodyPr>
-          <a:lstStyle/>
-          <a:p>
-            <a:pPr algn="l">
-              <a:spcBef>
-                <a:spcPts val="0"/>
-              </a:spcBef>
-              <a:spcAft>
-                <a:spcPts val="800"/>
-              </a:spcAft>
-            </a:pPr>
+          <a:bodyPr wrap="square">
+            <a:spAutoFit/>
+          </a:bodyPr>
+          <a:lstStyle/>
+          <a:p>
+            <a:pPr algn="l"/>
             <a:r>
               <a:rPr sz="1500" b="1" i="0">
                 <a:solidFill>
@@ -4425,19 +4353,12 @@
           <a:noFill/>
         </p:spPr>
         <p:txBody>
-          <a:bodyPr wrap="square" anchor="t" lIns="0" rIns="0" tIns="0" bIns="0">
-            <a:spAutoFit/>
-          </a:bodyPr>
-          <a:lstStyle/>
-          <a:p>
-            <a:pPr algn="r">
-              <a:spcBef>
-                <a:spcPts val="0"/>
-              </a:spcBef>
-              <a:spcAft>
-                <a:spcPts val="800"/>
-              </a:spcAft>
-            </a:pPr>
+          <a:bodyPr wrap="square">
+            <a:spAutoFit/>
+          </a:bodyPr>
+          <a:lstStyle/>
+          <a:p>
+            <a:pPr algn="r"/>
             <a:r>
               <a:rPr sz="1300" b="0" i="0">
                 <a:solidFill>
@@ -4467,169 +4388,114 @@
           <a:noFill/>
         </p:spPr>
         <p:txBody>
-          <a:bodyPr wrap="square" anchor="t" lIns="0" rIns="0" tIns="0" bIns="0">
+          <a:bodyPr wrap="square">
+            <a:spAutoFit/>
+          </a:bodyPr>
+          <a:lstStyle/>
+          <a:p>
+            <a:pPr algn="l"/>
+            <a:r>
+              <a:rPr sz="3400" b="1" i="0">
+                <a:solidFill>
+                  <a:srgbClr val="000000"/>
+                </a:solidFill>
+                <a:latin typeface="Arial"/>
+              </a:rPr>
+              <a:t>Percentages in Real Life</a:t>
+            </a:r>
+          </a:p>
+        </p:txBody>
+      </p:sp>
+      <p:sp>
+        <p:nvSpPr>
+          <p:cNvPr id="5" name="TextBox 4"/>
+          <p:cNvSpPr txBox="1"/>
+          <p:nvPr/>
+        </p:nvSpPr>
+        <p:spPr>
+          <a:xfrm>
+            <a:off x="457200" y="1600000"/>
+            <a:ext cx="11277295" cy="3600000"/>
+          </a:xfrm>
+          <a:prstGeom prst="rect">
+            <a:avLst/>
+          </a:prstGeom>
+          <a:noFill/>
+        </p:spPr>
+        <p:txBody>
+          <a:bodyPr wrap="square">
             <a:spAutoFit/>
           </a:bodyPr>
           <a:lstStyle/>
           <a:p>
             <a:pPr algn="l">
-              <a:spcBef>
-                <a:spcPts val="0"/>
-              </a:spcBef>
-              <a:spcAft>
-                <a:spcPts val="800"/>
-              </a:spcAft>
-            </a:pPr>
-            <a:r>
-              <a:rPr sz="3400" b="1" i="0">
-                <a:solidFill>
-                  <a:srgbClr val="000000"/>
-                </a:solidFill>
-                <a:latin typeface="Arial"/>
-              </a:rPr>
-              <a:t>Sorting the Equation Families</a:t>
-            </a:r>
-          </a:p>
-        </p:txBody>
-      </p:sp>
-      <p:sp>
-        <p:nvSpPr>
-          <p:cNvPr id="5" name="TextBox 4"/>
-          <p:cNvSpPr txBox="1"/>
-          <p:nvPr/>
-        </p:nvSpPr>
-        <p:spPr>
-          <a:xfrm>
-            <a:off x="457200" y="1691640"/>
-            <a:ext cx="11277295" cy="2377440"/>
-          </a:xfrm>
-          <a:prstGeom prst="rect">
-            <a:avLst/>
-          </a:prstGeom>
-          <a:noFill/>
-        </p:spPr>
-        <p:txBody>
-          <a:bodyPr wrap="square" anchor="t" lIns="0" rIns="0" tIns="0" bIns="0">
-            <a:spAutoFit/>
-          </a:bodyPr>
-          <a:lstStyle/>
-          <a:p>
-            <a:pPr algn="l">
-              <a:spcBef>
-                <a:spcPts val="0"/>
-              </a:spcBef>
               <a:spcAft>
                 <a:spcPts val="1400"/>
               </a:spcAft>
             </a:pPr>
             <a:r>
-              <a:rPr sz="2200" b="0" i="0">
+              <a:rPr sz="2200" b="0">
                 <a:solidFill>
                   <a:srgbClr val="000000"/>
                 </a:solidFill>
                 <a:latin typeface="Arial"/>
               </a:rPr>
-              <a:t>Over the last three weeks we've met one-step equations, two-step equations, and bracket equations.</a:t>
+              <a:t>Real-life percentage problems rarely tell you which method to use — you have to decide.</a:t>
             </a:r>
           </a:p>
           <a:p>
             <a:pPr algn="l">
-              <a:spcBef>
-                <a:spcPts val="0"/>
-              </a:spcBef>
               <a:spcAft>
                 <a:spcPts val="1400"/>
               </a:spcAft>
             </a:pPr>
             <a:r>
-              <a:rPr sz="2200" b="0" i="0">
+              <a:rPr sz="2200" b="0">
                 <a:solidFill>
                   <a:srgbClr val="000000"/>
                 </a:solidFill>
                 <a:latin typeface="Arial"/>
               </a:rPr>
-              <a:t>The first job when solving ANY equation is to identify which family it belongs to.</a:t>
+              <a:t>Look for the type of change: a straight calculation, a reverse problem, or interest over time.</a:t>
             </a:r>
           </a:p>
           <a:p>
             <a:pPr algn="l">
-              <a:spcBef>
-                <a:spcPts val="0"/>
-              </a:spcBef>
               <a:spcAft>
                 <a:spcPts val="1400"/>
               </a:spcAft>
             </a:pPr>
             <a:r>
-              <a:rPr sz="2200" b="0" i="0">
+              <a:rPr sz="2200" b="0">
                 <a:solidFill>
                   <a:srgbClr val="000000"/>
                 </a:solidFill>
                 <a:latin typeface="Arial"/>
               </a:rPr>
-              <a:t>Today's mixed practice will test all three — read carefully before you start solving.</a:t>
-            </a:r>
-          </a:p>
-        </p:txBody>
-      </p:sp>
-      <p:sp>
-        <p:nvSpPr>
-          <p:cNvPr id="6" name="Rounded Rectangle 5"/>
-          <p:cNvSpPr/>
-          <p:nvPr/>
-        </p:nvSpPr>
-        <p:spPr>
-          <a:xfrm>
-            <a:off x="457200" y="4297680"/>
-            <a:ext cx="11277295" cy="1371600"/>
-          </a:xfrm>
-          <a:prstGeom prst="roundRect">
-            <a:avLst/>
-          </a:prstGeom>
-          <a:solidFill>
-            <a:srgbClr val="F2F2F2"/>
-          </a:solidFill>
-          <a:ln w="9525">
-            <a:solidFill>
-              <a:srgbClr val="CCCCCC"/>
-            </a:solidFill>
-          </a:ln>
-          <a:effectLst/>
-        </p:spPr>
-        <p:style>
-          <a:lnRef idx="1">
-            <a:schemeClr val="accent1"/>
-          </a:lnRef>
-          <a:fillRef idx="3">
-            <a:schemeClr val="accent1"/>
-          </a:fillRef>
-          <a:effectRef idx="2">
-            <a:schemeClr val="accent1"/>
-          </a:effectRef>
-          <a:fontRef idx="minor">
-            <a:schemeClr val="lt1"/>
-          </a:fontRef>
-        </p:style>
-        <p:txBody>
-          <a:bodyPr rtlCol="0" anchor="ctr" wrap="square" lIns="274320" rIns="274320"/>
-          <a:lstStyle/>
-          <a:p>
-            <a:pPr algn="l"/>
-            <a:r>
-              <a:rPr sz="2200" b="1" i="0">
+              <a:t>This lesson mixes all the percentage skills from the last three weeks.</a:t>
+            </a:r>
+          </a:p>
+          <a:p>
+            <a:pPr algn="l">
+              <a:spcAft>
+                <a:spcPts val="1400"/>
+              </a:spcAft>
+            </a:pPr>
+            <a:r>
+              <a:rPr sz="2200" b="1">
                 <a:solidFill>
                   <a:srgbClr val="000000"/>
                 </a:solidFill>
                 <a:latin typeface="Arial"/>
               </a:rPr>
-              <a:t>Think, pair, share: Sort these into families: x + 5 = 12, 3(x + 1) = 9, 2x − 4 = 6. Which is which?</a:t>
-            </a:r>
-          </a:p>
-        </p:txBody>
-      </p:sp>
-      <p:sp>
-        <p:nvSpPr>
-          <p:cNvPr id="7" name="TextBox 6"/>
+              <a:t>Think, pair, share: A shop advert says '20% off, then VAT added at 20%'. Will the final price be the same as the original?</a:t>
+            </a:r>
+          </a:p>
+        </p:txBody>
+      </p:sp>
+      <p:sp>
+        <p:nvSpPr>
+          <p:cNvPr id="6" name="TextBox 5"/>
           <p:cNvSpPr txBox="1"/>
           <p:nvPr/>
         </p:nvSpPr>
@@ -4644,19 +4510,12 @@
           <a:noFill/>
         </p:spPr>
         <p:txBody>
-          <a:bodyPr wrap="square" anchor="t" lIns="0" rIns="0" tIns="0" bIns="0">
-            <a:spAutoFit/>
-          </a:bodyPr>
-          <a:lstStyle/>
-          <a:p>
-            <a:pPr algn="l">
-              <a:spcBef>
-                <a:spcPts val="0"/>
-              </a:spcBef>
-              <a:spcAft>
-                <a:spcPts val="800"/>
-              </a:spcAft>
-            </a:pPr>
+          <a:bodyPr wrap="square">
+            <a:spAutoFit/>
+          </a:bodyPr>
+          <a:lstStyle/>
+          <a:p>
+            <a:pPr algn="l"/>
             <a:r>
               <a:rPr sz="1100" b="0" i="0">
                 <a:solidFill>
@@ -4664,7 +4523,7 @@
                 </a:solidFill>
                 <a:latin typeface="Arial"/>
               </a:rPr>
-              <a:t>Y8 Solving Linear Equations — Lower-to-Middle Set</a:t>
+              <a:t>Y8 Percentages and Proportionality — Middle Set</a:t>
             </a:r>
           </a:p>
         </p:txBody>
@@ -4712,252 +4571,196 @@
           <a:noFill/>
         </p:spPr>
         <p:txBody>
-          <a:bodyPr wrap="square" anchor="t" lIns="0" rIns="0" tIns="0" bIns="0">
+          <a:bodyPr wrap="square">
+            <a:spAutoFit/>
+          </a:bodyPr>
+          <a:lstStyle/>
+          <a:p>
+            <a:pPr algn="l"/>
+            <a:r>
+              <a:rPr sz="1500" b="1" i="0">
+                <a:solidFill>
+                  <a:srgbClr val="595959"/>
+                </a:solidFill>
+                <a:latin typeface="Arial"/>
+              </a:rPr>
+              <a:t>MODELLING: I DO</a:t>
+            </a:r>
+          </a:p>
+        </p:txBody>
+      </p:sp>
+      <p:sp>
+        <p:nvSpPr>
+          <p:cNvPr id="3" name="TextBox 2"/>
+          <p:cNvSpPr txBox="1"/>
+          <p:nvPr/>
+        </p:nvSpPr>
+        <p:spPr>
+          <a:xfrm>
+            <a:off x="7619695" y="256032"/>
+            <a:ext cx="4114800" cy="365760"/>
+          </a:xfrm>
+          <a:prstGeom prst="rect">
+            <a:avLst/>
+          </a:prstGeom>
+          <a:noFill/>
+        </p:spPr>
+        <p:txBody>
+          <a:bodyPr wrap="square">
+            <a:spAutoFit/>
+          </a:bodyPr>
+          <a:lstStyle/>
+          <a:p>
+            <a:pPr algn="r"/>
+            <a:r>
+              <a:rPr sz="1300" b="0" i="0">
+                <a:solidFill>
+                  <a:srgbClr val="595959"/>
+                </a:solidFill>
+                <a:latin typeface="Arial"/>
+              </a:rPr>
+              <a:t>L12</a:t>
+            </a:r>
+          </a:p>
+        </p:txBody>
+      </p:sp>
+      <p:sp>
+        <p:nvSpPr>
+          <p:cNvPr id="4" name="TextBox 3"/>
+          <p:cNvSpPr txBox="1"/>
+          <p:nvPr/>
+        </p:nvSpPr>
+        <p:spPr>
+          <a:xfrm>
+            <a:off x="457200" y="777240"/>
+            <a:ext cx="11277295" cy="640080"/>
+          </a:xfrm>
+          <a:prstGeom prst="rect">
+            <a:avLst/>
+          </a:prstGeom>
+          <a:noFill/>
+        </p:spPr>
+        <p:txBody>
+          <a:bodyPr wrap="square">
+            <a:spAutoFit/>
+          </a:bodyPr>
+          <a:lstStyle/>
+          <a:p>
+            <a:pPr algn="l"/>
+            <a:r>
+              <a:rPr sz="3400" b="1" i="0">
+                <a:solidFill>
+                  <a:srgbClr val="000000"/>
+                </a:solidFill>
+                <a:latin typeface="Arial"/>
+              </a:rPr>
+              <a:t>I Do — Teacher Models</a:t>
+            </a:r>
+          </a:p>
+        </p:txBody>
+      </p:sp>
+      <p:sp>
+        <p:nvSpPr>
+          <p:cNvPr id="5" name="TextBox 4"/>
+          <p:cNvSpPr txBox="1"/>
+          <p:nvPr/>
+        </p:nvSpPr>
+        <p:spPr>
+          <a:xfrm>
+            <a:off x="457200" y="1600000"/>
+            <a:ext cx="11277295" cy="822960"/>
+          </a:xfrm>
+          <a:prstGeom prst="rect">
+            <a:avLst/>
+          </a:prstGeom>
+          <a:noFill/>
+        </p:spPr>
+        <p:txBody>
+          <a:bodyPr wrap="square">
+            <a:spAutoFit/>
+          </a:bodyPr>
+          <a:lstStyle/>
+          <a:p>
+            <a:pPr algn="l"/>
+            <a:r>
+              <a:rPr sz="2400" b="1" i="0">
+                <a:solidFill>
+                  <a:srgbClr val="000000"/>
+                </a:solidFill>
+                <a:latin typeface="Arial"/>
+              </a:rPr>
+              <a:t>A £45 top has 20% off in a sale. VAT at 20% is then added. Find the final price, and compare it to the original £45.</a:t>
+            </a:r>
+          </a:p>
+        </p:txBody>
+      </p:sp>
+      <p:sp>
+        <p:nvSpPr>
+          <p:cNvPr id="6" name="TextBox 5"/>
+          <p:cNvSpPr txBox="1"/>
+          <p:nvPr/>
+        </p:nvSpPr>
+        <p:spPr>
+          <a:xfrm>
+            <a:off x="457200" y="2602960"/>
+            <a:ext cx="11277295" cy="3843560"/>
+          </a:xfrm>
+          <a:prstGeom prst="rect">
+            <a:avLst/>
+          </a:prstGeom>
+          <a:noFill/>
+        </p:spPr>
+        <p:txBody>
+          <a:bodyPr wrap="square">
             <a:spAutoFit/>
           </a:bodyPr>
           <a:lstStyle/>
           <a:p>
             <a:pPr algn="l">
-              <a:spcBef>
-                <a:spcPts val="0"/>
-              </a:spcBef>
               <a:spcAft>
-                <a:spcPts val="800"/>
+                <a:spcPts val="1400"/>
               </a:spcAft>
             </a:pPr>
             <a:r>
-              <a:rPr sz="1500" b="1" i="0">
-                <a:solidFill>
-                  <a:srgbClr val="595959"/>
-                </a:solidFill>
-                <a:latin typeface="Arial"/>
-              </a:rPr>
-              <a:t>MODELLING: I DO</a:t>
-            </a:r>
-          </a:p>
-        </p:txBody>
-      </p:sp>
-      <p:sp>
-        <p:nvSpPr>
-          <p:cNvPr id="3" name="TextBox 2"/>
-          <p:cNvSpPr txBox="1"/>
-          <p:nvPr/>
-        </p:nvSpPr>
-        <p:spPr>
-          <a:xfrm>
-            <a:off x="7619695" y="256032"/>
-            <a:ext cx="4114800" cy="365760"/>
-          </a:xfrm>
-          <a:prstGeom prst="rect">
-            <a:avLst/>
-          </a:prstGeom>
-          <a:noFill/>
-        </p:spPr>
-        <p:txBody>
-          <a:bodyPr wrap="square" anchor="t" lIns="0" rIns="0" tIns="0" bIns="0">
-            <a:spAutoFit/>
-          </a:bodyPr>
-          <a:lstStyle/>
-          <a:p>
-            <a:pPr algn="r">
-              <a:spcBef>
-                <a:spcPts val="0"/>
-              </a:spcBef>
+              <a:rPr sz="2100" b="0">
+                <a:solidFill>
+                  <a:srgbClr val="000000"/>
+                </a:solidFill>
+                <a:latin typeface="Arial"/>
+              </a:rPr>
+              <a:t>-  Sale price: 45 × 0.8 = 36</a:t>
+            </a:r>
+          </a:p>
+          <a:p>
+            <a:pPr algn="l">
               <a:spcAft>
-                <a:spcPts val="800"/>
+                <a:spcPts val="1400"/>
               </a:spcAft>
             </a:pPr>
             <a:r>
-              <a:rPr sz="1300" b="0" i="0">
-                <a:solidFill>
-                  <a:srgbClr val="595959"/>
-                </a:solidFill>
-                <a:latin typeface="Arial"/>
-              </a:rPr>
-              <a:t>L12</a:t>
-            </a:r>
-          </a:p>
-        </p:txBody>
-      </p:sp>
-      <p:sp>
-        <p:nvSpPr>
-          <p:cNvPr id="4" name="TextBox 3"/>
-          <p:cNvSpPr txBox="1"/>
-          <p:nvPr/>
-        </p:nvSpPr>
-        <p:spPr>
-          <a:xfrm>
-            <a:off x="457200" y="777240"/>
-            <a:ext cx="11277295" cy="640080"/>
-          </a:xfrm>
-          <a:prstGeom prst="rect">
-            <a:avLst/>
-          </a:prstGeom>
-          <a:noFill/>
-        </p:spPr>
-        <p:txBody>
-          <a:bodyPr wrap="square" anchor="t" lIns="0" rIns="0" tIns="0" bIns="0">
-            <a:spAutoFit/>
-          </a:bodyPr>
-          <a:lstStyle/>
+              <a:rPr sz="2100" b="0">
+                <a:solidFill>
+                  <a:srgbClr val="000000"/>
+                </a:solidFill>
+                <a:latin typeface="Arial"/>
+              </a:rPr>
+              <a:t>-  Add VAT: 36 × 1.2 = 43.20</a:t>
+            </a:r>
+          </a:p>
           <a:p>
             <a:pPr algn="l">
-              <a:spcBef>
-                <a:spcPts val="0"/>
-              </a:spcBef>
               <a:spcAft>
-                <a:spcPts val="800"/>
+                <a:spcPts val="1400"/>
               </a:spcAft>
             </a:pPr>
             <a:r>
-              <a:rPr sz="3400" b="1" i="0">
+              <a:rPr sz="2100" b="0">
                 <a:solidFill>
                   <a:srgbClr val="000000"/>
                 </a:solidFill>
                 <a:latin typeface="Arial"/>
               </a:rPr>
-              <a:t>I Do — Teacher Models</a:t>
-            </a:r>
-          </a:p>
-        </p:txBody>
-      </p:sp>
-      <p:sp>
-        <p:nvSpPr>
-          <p:cNvPr id="5" name="TextBox 4"/>
-          <p:cNvSpPr txBox="1"/>
-          <p:nvPr/>
-        </p:nvSpPr>
-        <p:spPr>
-          <a:xfrm>
-            <a:off x="457200" y="1508760"/>
-            <a:ext cx="11277295" cy="960120"/>
-          </a:xfrm>
-          <a:prstGeom prst="rect">
-            <a:avLst/>
-          </a:prstGeom>
-          <a:noFill/>
-        </p:spPr>
-        <p:txBody>
-          <a:bodyPr wrap="square" anchor="t" lIns="0" rIns="0" tIns="0" bIns="0">
-            <a:spAutoFit/>
-          </a:bodyPr>
-          <a:lstStyle/>
-          <a:p>
-            <a:pPr algn="l">
-              <a:spcBef>
-                <a:spcPts val="0"/>
-              </a:spcBef>
-              <a:spcAft>
-                <a:spcPts val="0"/>
-              </a:spcAft>
-            </a:pPr>
-            <a:r>
-              <a:rPr sz="2400" b="1" i="0">
-                <a:solidFill>
-                  <a:srgbClr val="000000"/>
-                </a:solidFill>
-                <a:latin typeface="Arial"/>
-              </a:rPr>
-              <a:t>Sort and solve: 4(x − 3) = 8</a:t>
-            </a:r>
-          </a:p>
-        </p:txBody>
-      </p:sp>
-      <p:sp>
-        <p:nvSpPr>
-          <p:cNvPr id="6" name="TextBox 5"/>
-          <p:cNvSpPr txBox="1"/>
-          <p:nvPr/>
-        </p:nvSpPr>
-        <p:spPr>
-          <a:xfrm>
-            <a:off x="457200" y="2606040"/>
-            <a:ext cx="11277295" cy="3657600"/>
-          </a:xfrm>
-          <a:prstGeom prst="rect">
-            <a:avLst/>
-          </a:prstGeom>
-          <a:noFill/>
-        </p:spPr>
-        <p:txBody>
-          <a:bodyPr wrap="square" anchor="t" lIns="0" rIns="0" tIns="0" bIns="0">
-            <a:spAutoFit/>
-          </a:bodyPr>
-          <a:lstStyle/>
-          <a:p>
-            <a:pPr algn="l">
-              <a:spcBef>
-                <a:spcPts val="0"/>
-              </a:spcBef>
-              <a:spcAft>
-                <a:spcPts val="1200"/>
-              </a:spcAft>
-            </a:pPr>
-            <a:r>
-              <a:rPr sz="2100" b="0" i="0">
-                <a:solidFill>
-                  <a:srgbClr val="000000"/>
-                </a:solidFill>
-                <a:latin typeface="Arial"/>
-              </a:rPr>
-              <a:t>-  Spot the family: this has a bracket, so it's a bracket equation.</a:t>
-            </a:r>
-          </a:p>
-          <a:p>
-            <a:pPr algn="l">
-              <a:spcBef>
-                <a:spcPts val="0"/>
-              </a:spcBef>
-              <a:spcAft>
-                <a:spcPts val="1200"/>
-              </a:spcAft>
-            </a:pPr>
-            <a:r>
-              <a:rPr sz="2100" b="0" i="0">
-                <a:solidFill>
-                  <a:srgbClr val="000000"/>
-                </a:solidFill>
-                <a:latin typeface="Arial"/>
-              </a:rPr>
-              <a:t>-  Divide both sides by 4: x − 3 = 2</a:t>
-            </a:r>
-          </a:p>
-          <a:p>
-            <a:pPr algn="l">
-              <a:spcBef>
-                <a:spcPts val="0"/>
-              </a:spcBef>
-              <a:spcAft>
-                <a:spcPts val="1200"/>
-              </a:spcAft>
-            </a:pPr>
-            <a:r>
-              <a:rPr sz="2100" b="0" i="0">
-                <a:solidFill>
-                  <a:srgbClr val="000000"/>
-                </a:solidFill>
-                <a:latin typeface="Arial"/>
-              </a:rPr>
-              <a:t>-  Add 3 to both sides: x = 5</a:t>
-            </a:r>
-          </a:p>
-          <a:p>
-            <a:pPr algn="l">
-              <a:spcBef>
-                <a:spcPts val="0"/>
-              </a:spcBef>
-              <a:spcAft>
-                <a:spcPts val="1200"/>
-              </a:spcAft>
-            </a:pPr>
-            <a:r>
-              <a:rPr sz="2100" b="0" i="0">
-                <a:solidFill>
-                  <a:srgbClr val="000000"/>
-                </a:solidFill>
-                <a:latin typeface="Arial"/>
-              </a:rPr>
-              <a:t>-  Check: 4 × (5 − 3) = 4 × 2 = 8 ✓</a:t>
+              <a:t>-  Final price is £43.20 — £1.80 less than the original £45</a:t>
             </a:r>
           </a:p>
         </p:txBody>
@@ -4979,19 +4782,12 @@
           <a:noFill/>
         </p:spPr>
         <p:txBody>
-          <a:bodyPr wrap="square" anchor="t" lIns="0" rIns="0" tIns="0" bIns="0">
-            <a:spAutoFit/>
-          </a:bodyPr>
-          <a:lstStyle/>
-          <a:p>
-            <a:pPr algn="l">
-              <a:spcBef>
-                <a:spcPts val="0"/>
-              </a:spcBef>
-              <a:spcAft>
-                <a:spcPts val="800"/>
-              </a:spcAft>
-            </a:pPr>
+          <a:bodyPr wrap="square">
+            <a:spAutoFit/>
+          </a:bodyPr>
+          <a:lstStyle/>
+          <a:p>
+            <a:pPr algn="l"/>
             <a:r>
               <a:rPr sz="1100" b="0" i="0">
                 <a:solidFill>
@@ -4999,7 +4795,7 @@
                 </a:solidFill>
                 <a:latin typeface="Arial"/>
               </a:rPr>
-              <a:t>Y8 Solving Linear Equations — Lower-to-Middle Set</a:t>
+              <a:t>Y8 Percentages and Proportionality — Middle Set</a:t>
             </a:r>
           </a:p>
         </p:txBody>
@@ -5047,252 +4843,180 @@
           <a:noFill/>
         </p:spPr>
         <p:txBody>
-          <a:bodyPr wrap="square" anchor="t" lIns="0" rIns="0" tIns="0" bIns="0">
+          <a:bodyPr wrap="square">
+            <a:spAutoFit/>
+          </a:bodyPr>
+          <a:lstStyle/>
+          <a:p>
+            <a:pPr algn="l"/>
+            <a:r>
+              <a:rPr sz="1500" b="1" i="0">
+                <a:solidFill>
+                  <a:srgbClr val="595959"/>
+                </a:solidFill>
+                <a:latin typeface="Arial"/>
+              </a:rPr>
+              <a:t>MODELLING: WE DO</a:t>
+            </a:r>
+          </a:p>
+        </p:txBody>
+      </p:sp>
+      <p:sp>
+        <p:nvSpPr>
+          <p:cNvPr id="3" name="TextBox 2"/>
+          <p:cNvSpPr txBox="1"/>
+          <p:nvPr/>
+        </p:nvSpPr>
+        <p:spPr>
+          <a:xfrm>
+            <a:off x="7619695" y="256032"/>
+            <a:ext cx="4114800" cy="365760"/>
+          </a:xfrm>
+          <a:prstGeom prst="rect">
+            <a:avLst/>
+          </a:prstGeom>
+          <a:noFill/>
+        </p:spPr>
+        <p:txBody>
+          <a:bodyPr wrap="square">
+            <a:spAutoFit/>
+          </a:bodyPr>
+          <a:lstStyle/>
+          <a:p>
+            <a:pPr algn="r"/>
+            <a:r>
+              <a:rPr sz="1300" b="0" i="0">
+                <a:solidFill>
+                  <a:srgbClr val="595959"/>
+                </a:solidFill>
+                <a:latin typeface="Arial"/>
+              </a:rPr>
+              <a:t>L12</a:t>
+            </a:r>
+          </a:p>
+        </p:txBody>
+      </p:sp>
+      <p:sp>
+        <p:nvSpPr>
+          <p:cNvPr id="4" name="TextBox 3"/>
+          <p:cNvSpPr txBox="1"/>
+          <p:nvPr/>
+        </p:nvSpPr>
+        <p:spPr>
+          <a:xfrm>
+            <a:off x="457200" y="777240"/>
+            <a:ext cx="11277295" cy="640080"/>
+          </a:xfrm>
+          <a:prstGeom prst="rect">
+            <a:avLst/>
+          </a:prstGeom>
+          <a:noFill/>
+        </p:spPr>
+        <p:txBody>
+          <a:bodyPr wrap="square">
+            <a:spAutoFit/>
+          </a:bodyPr>
+          <a:lstStyle/>
+          <a:p>
+            <a:pPr algn="l"/>
+            <a:r>
+              <a:rPr sz="3400" b="1" i="0">
+                <a:solidFill>
+                  <a:srgbClr val="000000"/>
+                </a:solidFill>
+                <a:latin typeface="Arial"/>
+              </a:rPr>
+              <a:t>We Do — Guided Practice</a:t>
+            </a:r>
+          </a:p>
+        </p:txBody>
+      </p:sp>
+      <p:sp>
+        <p:nvSpPr>
+          <p:cNvPr id="5" name="TextBox 4"/>
+          <p:cNvSpPr txBox="1"/>
+          <p:nvPr/>
+        </p:nvSpPr>
+        <p:spPr>
+          <a:xfrm>
+            <a:off x="457200" y="1600000"/>
+            <a:ext cx="11277295" cy="822960"/>
+          </a:xfrm>
+          <a:prstGeom prst="rect">
+            <a:avLst/>
+          </a:prstGeom>
+          <a:noFill/>
+        </p:spPr>
+        <p:txBody>
+          <a:bodyPr wrap="square">
+            <a:spAutoFit/>
+          </a:bodyPr>
+          <a:lstStyle/>
+          <a:p>
+            <a:pPr algn="l"/>
+            <a:r>
+              <a:rPr sz="2400" b="1" i="0">
+                <a:solidFill>
+                  <a:srgbClr val="000000"/>
+                </a:solidFill>
+                <a:latin typeface="Arial"/>
+              </a:rPr>
+              <a:t>Wages rise by 3% each year for 2 years, from £28,000. Find the wage after 2 years (compound).</a:t>
+            </a:r>
+          </a:p>
+        </p:txBody>
+      </p:sp>
+      <p:sp>
+        <p:nvSpPr>
+          <p:cNvPr id="6" name="TextBox 5"/>
+          <p:cNvSpPr txBox="1"/>
+          <p:nvPr/>
+        </p:nvSpPr>
+        <p:spPr>
+          <a:xfrm>
+            <a:off x="457200" y="2602960"/>
+            <a:ext cx="11277295" cy="3843560"/>
+          </a:xfrm>
+          <a:prstGeom prst="rect">
+            <a:avLst/>
+          </a:prstGeom>
+          <a:noFill/>
+        </p:spPr>
+        <p:txBody>
+          <a:bodyPr wrap="square">
             <a:spAutoFit/>
           </a:bodyPr>
           <a:lstStyle/>
           <a:p>
             <a:pPr algn="l">
-              <a:spcBef>
-                <a:spcPts val="0"/>
-              </a:spcBef>
               <a:spcAft>
-                <a:spcPts val="800"/>
+                <a:spcPts val="1400"/>
               </a:spcAft>
             </a:pPr>
             <a:r>
-              <a:rPr sz="1500" b="1" i="0">
-                <a:solidFill>
-                  <a:srgbClr val="595959"/>
-                </a:solidFill>
-                <a:latin typeface="Arial"/>
-              </a:rPr>
-              <a:t>MODELLING: WE DO</a:t>
-            </a:r>
-          </a:p>
-        </p:txBody>
-      </p:sp>
-      <p:sp>
-        <p:nvSpPr>
-          <p:cNvPr id="3" name="TextBox 2"/>
-          <p:cNvSpPr txBox="1"/>
-          <p:nvPr/>
-        </p:nvSpPr>
-        <p:spPr>
-          <a:xfrm>
-            <a:off x="7619695" y="256032"/>
-            <a:ext cx="4114800" cy="365760"/>
-          </a:xfrm>
-          <a:prstGeom prst="rect">
-            <a:avLst/>
-          </a:prstGeom>
-          <a:noFill/>
-        </p:spPr>
-        <p:txBody>
-          <a:bodyPr wrap="square" anchor="t" lIns="0" rIns="0" tIns="0" bIns="0">
-            <a:spAutoFit/>
-          </a:bodyPr>
-          <a:lstStyle/>
-          <a:p>
-            <a:pPr algn="r">
-              <a:spcBef>
-                <a:spcPts val="0"/>
-              </a:spcBef>
+              <a:rPr sz="2100" b="0">
+                <a:solidFill>
+                  <a:srgbClr val="000000"/>
+                </a:solidFill>
+                <a:latin typeface="Arial"/>
+              </a:rPr>
+              <a:t>-  After year 1: 28,000 × 1.03 = 28,840</a:t>
+            </a:r>
+          </a:p>
+          <a:p>
+            <a:pPr algn="l">
               <a:spcAft>
-                <a:spcPts val="800"/>
+                <a:spcPts val="1400"/>
               </a:spcAft>
             </a:pPr>
             <a:r>
-              <a:rPr sz="1300" b="0" i="0">
-                <a:solidFill>
-                  <a:srgbClr val="595959"/>
-                </a:solidFill>
-                <a:latin typeface="Arial"/>
-              </a:rPr>
-              <a:t>L12</a:t>
-            </a:r>
-          </a:p>
-        </p:txBody>
-      </p:sp>
-      <p:sp>
-        <p:nvSpPr>
-          <p:cNvPr id="4" name="TextBox 3"/>
-          <p:cNvSpPr txBox="1"/>
-          <p:nvPr/>
-        </p:nvSpPr>
-        <p:spPr>
-          <a:xfrm>
-            <a:off x="457200" y="777240"/>
-            <a:ext cx="11277295" cy="640080"/>
-          </a:xfrm>
-          <a:prstGeom prst="rect">
-            <a:avLst/>
-          </a:prstGeom>
-          <a:noFill/>
-        </p:spPr>
-        <p:txBody>
-          <a:bodyPr wrap="square" anchor="t" lIns="0" rIns="0" tIns="0" bIns="0">
-            <a:spAutoFit/>
-          </a:bodyPr>
-          <a:lstStyle/>
-          <a:p>
-            <a:pPr algn="l">
-              <a:spcBef>
-                <a:spcPts val="0"/>
-              </a:spcBef>
-              <a:spcAft>
-                <a:spcPts val="800"/>
-              </a:spcAft>
-            </a:pPr>
-            <a:r>
-              <a:rPr sz="3400" b="1" i="0">
+              <a:rPr sz="2100" b="0">
                 <a:solidFill>
                   <a:srgbClr val="000000"/>
                 </a:solidFill>
                 <a:latin typeface="Arial"/>
               </a:rPr>
-              <a:t>We Do — Guided Practice</a:t>
-            </a:r>
-          </a:p>
-        </p:txBody>
-      </p:sp>
-      <p:sp>
-        <p:nvSpPr>
-          <p:cNvPr id="5" name="TextBox 4"/>
-          <p:cNvSpPr txBox="1"/>
-          <p:nvPr/>
-        </p:nvSpPr>
-        <p:spPr>
-          <a:xfrm>
-            <a:off x="457200" y="1508760"/>
-            <a:ext cx="11277295" cy="960120"/>
-          </a:xfrm>
-          <a:prstGeom prst="rect">
-            <a:avLst/>
-          </a:prstGeom>
-          <a:noFill/>
-        </p:spPr>
-        <p:txBody>
-          <a:bodyPr wrap="square" anchor="t" lIns="0" rIns="0" tIns="0" bIns="0">
-            <a:spAutoFit/>
-          </a:bodyPr>
-          <a:lstStyle/>
-          <a:p>
-            <a:pPr algn="l">
-              <a:spcBef>
-                <a:spcPts val="0"/>
-              </a:spcBef>
-              <a:spcAft>
-                <a:spcPts val="0"/>
-              </a:spcAft>
-            </a:pPr>
-            <a:r>
-              <a:rPr sz="2400" b="1" i="0">
-                <a:solidFill>
-                  <a:srgbClr val="000000"/>
-                </a:solidFill>
-                <a:latin typeface="Arial"/>
-              </a:rPr>
-              <a:t>Sort and solve: 6x + 4 = -8</a:t>
-            </a:r>
-          </a:p>
-        </p:txBody>
-      </p:sp>
-      <p:sp>
-        <p:nvSpPr>
-          <p:cNvPr id="6" name="TextBox 5"/>
-          <p:cNvSpPr txBox="1"/>
-          <p:nvPr/>
-        </p:nvSpPr>
-        <p:spPr>
-          <a:xfrm>
-            <a:off x="457200" y="2606040"/>
-            <a:ext cx="11277295" cy="3657600"/>
-          </a:xfrm>
-          <a:prstGeom prst="rect">
-            <a:avLst/>
-          </a:prstGeom>
-          <a:noFill/>
-        </p:spPr>
-        <p:txBody>
-          <a:bodyPr wrap="square" anchor="t" lIns="0" rIns="0" tIns="0" bIns="0">
-            <a:spAutoFit/>
-          </a:bodyPr>
-          <a:lstStyle/>
-          <a:p>
-            <a:pPr algn="l">
-              <a:spcBef>
-                <a:spcPts val="0"/>
-              </a:spcBef>
-              <a:spcAft>
-                <a:spcPts val="1200"/>
-              </a:spcAft>
-            </a:pPr>
-            <a:r>
-              <a:rPr sz="2100" b="0" i="0">
-                <a:solidFill>
-                  <a:srgbClr val="000000"/>
-                </a:solidFill>
-                <a:latin typeface="Arial"/>
-              </a:rPr>
-              <a:t>-  Spot the family: no brackets, two operations (×6 then +4) — a two-step equation.</a:t>
-            </a:r>
-          </a:p>
-          <a:p>
-            <a:pPr algn="l">
-              <a:spcBef>
-                <a:spcPts val="0"/>
-              </a:spcBef>
-              <a:spcAft>
-                <a:spcPts val="1200"/>
-              </a:spcAft>
-            </a:pPr>
-            <a:r>
-              <a:rPr sz="2100" b="0" i="0">
-                <a:solidFill>
-                  <a:srgbClr val="000000"/>
-                </a:solidFill>
-                <a:latin typeface="Arial"/>
-              </a:rPr>
-              <a:t>-  Subtract 4 from both sides: 6x = -12</a:t>
-            </a:r>
-          </a:p>
-          <a:p>
-            <a:pPr algn="l">
-              <a:spcBef>
-                <a:spcPts val="0"/>
-              </a:spcBef>
-              <a:spcAft>
-                <a:spcPts val="1200"/>
-              </a:spcAft>
-            </a:pPr>
-            <a:r>
-              <a:rPr sz="2100" b="0" i="0">
-                <a:solidFill>
-                  <a:srgbClr val="000000"/>
-                </a:solidFill>
-                <a:latin typeface="Arial"/>
-              </a:rPr>
-              <a:t>-  Divide both sides by 6: x = -2</a:t>
-            </a:r>
-          </a:p>
-          <a:p>
-            <a:pPr algn="l">
-              <a:spcBef>
-                <a:spcPts val="0"/>
-              </a:spcBef>
-              <a:spcAft>
-                <a:spcPts val="1200"/>
-              </a:spcAft>
-            </a:pPr>
-            <a:r>
-              <a:rPr sz="2100" b="0" i="0">
-                <a:solidFill>
-                  <a:srgbClr val="000000"/>
-                </a:solidFill>
-                <a:latin typeface="Arial"/>
-              </a:rPr>
-              <a:t>-  Check: 6 × (-2) + 4 = -12 + 4 = -8 ✓</a:t>
+              <a:t>-  After year 2: 28,840 × 1.03 = £29,705.20</a:t>
             </a:r>
           </a:p>
         </p:txBody>
@@ -5314,19 +5038,12 @@
           <a:noFill/>
         </p:spPr>
         <p:txBody>
-          <a:bodyPr wrap="square" anchor="t" lIns="0" rIns="0" tIns="0" bIns="0">
-            <a:spAutoFit/>
-          </a:bodyPr>
-          <a:lstStyle/>
-          <a:p>
-            <a:pPr algn="l">
-              <a:spcBef>
-                <a:spcPts val="0"/>
-              </a:spcBef>
-              <a:spcAft>
-                <a:spcPts val="800"/>
-              </a:spcAft>
-            </a:pPr>
+          <a:bodyPr wrap="square">
+            <a:spAutoFit/>
+          </a:bodyPr>
+          <a:lstStyle/>
+          <a:p>
+            <a:pPr algn="l"/>
             <a:r>
               <a:rPr sz="1100" b="0" i="0">
                 <a:solidFill>
@@ -5334,7 +5051,7 @@
                 </a:solidFill>
                 <a:latin typeface="Arial"/>
               </a:rPr>
-              <a:t>Y8 Solving Linear Equations — Lower-to-Middle Set</a:t>
+              <a:t>Y8 Percentages and Proportionality — Middle Set</a:t>
             </a:r>
           </a:p>
         </p:txBody>
@@ -5382,19 +5099,12 @@
           <a:noFill/>
         </p:spPr>
         <p:txBody>
-          <a:bodyPr wrap="square" anchor="t" lIns="0" rIns="0" tIns="0" bIns="0">
-            <a:spAutoFit/>
-          </a:bodyPr>
-          <a:lstStyle/>
-          <a:p>
-            <a:pPr algn="l">
-              <a:spcBef>
-                <a:spcPts val="0"/>
-              </a:spcBef>
-              <a:spcAft>
-                <a:spcPts val="800"/>
-              </a:spcAft>
-            </a:pPr>
+          <a:bodyPr wrap="square">
+            <a:spAutoFit/>
+          </a:bodyPr>
+          <a:lstStyle/>
+          <a:p>
+            <a:pPr algn="l"/>
             <a:r>
               <a:rPr sz="1500" b="1" i="0">
                 <a:solidFill>
@@ -5424,19 +5134,12 @@
           <a:noFill/>
         </p:spPr>
         <p:txBody>
-          <a:bodyPr wrap="square" anchor="t" lIns="0" rIns="0" tIns="0" bIns="0">
-            <a:spAutoFit/>
-          </a:bodyPr>
-          <a:lstStyle/>
-          <a:p>
-            <a:pPr algn="r">
-              <a:spcBef>
-                <a:spcPts val="0"/>
-              </a:spcBef>
-              <a:spcAft>
-                <a:spcPts val="800"/>
-              </a:spcAft>
-            </a:pPr>
+          <a:bodyPr wrap="square">
+            <a:spAutoFit/>
+          </a:bodyPr>
+          <a:lstStyle/>
+          <a:p>
+            <a:pPr algn="r"/>
             <a:r>
               <a:rPr sz="1300" b="0" i="0">
                 <a:solidFill>
@@ -5466,19 +5169,12 @@
           <a:noFill/>
         </p:spPr>
         <p:txBody>
-          <a:bodyPr wrap="square" anchor="t" lIns="0" rIns="0" tIns="0" bIns="0">
-            <a:spAutoFit/>
-          </a:bodyPr>
-          <a:lstStyle/>
-          <a:p>
-            <a:pPr algn="l">
-              <a:spcBef>
-                <a:spcPts val="0"/>
-              </a:spcBef>
-              <a:spcAft>
-                <a:spcPts val="800"/>
-              </a:spcAft>
-            </a:pPr>
+          <a:bodyPr wrap="square">
+            <a:spAutoFit/>
+          </a:bodyPr>
+          <a:lstStyle/>
+          <a:p>
+            <a:pPr algn="l"/>
             <a:r>
               <a:rPr sz="3400" b="1" i="0">
                 <a:solidFill>
@@ -5499,7 +5195,7 @@
         </p:nvSpPr>
         <p:spPr>
           <a:xfrm>
-            <a:off x="457200" y="1371600"/>
+            <a:off x="457200" y="1417320"/>
             <a:ext cx="11277295" cy="365760"/>
           </a:xfrm>
           <a:prstGeom prst="rect">
@@ -5508,21 +5204,14 @@
           <a:noFill/>
         </p:spPr>
         <p:txBody>
-          <a:bodyPr wrap="square" anchor="t" lIns="0" rIns="0" tIns="0" bIns="0">
-            <a:spAutoFit/>
-          </a:bodyPr>
-          <a:lstStyle/>
-          <a:p>
-            <a:pPr algn="l">
-              <a:spcBef>
-                <a:spcPts val="0"/>
-              </a:spcBef>
-              <a:spcAft>
-                <a:spcPts val="800"/>
-              </a:spcAft>
-            </a:pPr>
-            <a:r>
-              <a:rPr sz="1600" b="0" i="1">
+          <a:bodyPr wrap="square">
+            <a:spAutoFit/>
+          </a:bodyPr>
+          <a:lstStyle/>
+          <a:p>
+            <a:pPr algn="l"/>
+            <a:r>
+              <a:rPr sz="1600" b="0" i="0">
                 <a:solidFill>
                   <a:srgbClr val="595959"/>
                 </a:solidFill>
@@ -5535,47 +5224,27 @@
       </p:sp>
       <p:sp>
         <p:nvSpPr>
-          <p:cNvPr id="6" name="Rounded Rectangle 5"/>
-          <p:cNvSpPr/>
-          <p:nvPr/>
-        </p:nvSpPr>
-        <p:spPr>
-          <a:xfrm>
-            <a:off x="457200" y="1874519"/>
-            <a:ext cx="5455767" cy="2103120"/>
-          </a:xfrm>
-          <a:prstGeom prst="roundRect">
-            <a:avLst/>
-          </a:prstGeom>
-          <a:solidFill>
-            <a:srgbClr val="FFFFFF"/>
-          </a:solidFill>
-          <a:ln w="12700">
-            <a:solidFill>
-              <a:srgbClr val="BFBFBF"/>
-            </a:solidFill>
-          </a:ln>
-          <a:effectLst/>
-        </p:spPr>
-        <p:style>
-          <a:lnRef idx="1">
-            <a:schemeClr val="accent1"/>
-          </a:lnRef>
-          <a:fillRef idx="3">
-            <a:schemeClr val="accent1"/>
-          </a:fillRef>
-          <a:effectRef idx="2">
-            <a:schemeClr val="accent1"/>
-          </a:effectRef>
-          <a:fontRef idx="minor">
-            <a:schemeClr val="lt1"/>
-          </a:fontRef>
-        </p:style>
-        <p:txBody>
-          <a:bodyPr rtlCol="0" anchor="ctr" wrap="square" lIns="201168" rIns="201168" tIns="128016" bIns="73152"/>
-          <a:lstStyle/>
-          <a:p>
-            <a:pPr algn="ctr"/>
+          <p:cNvPr id="6" name="TextBox 5"/>
+          <p:cNvSpPr txBox="1"/>
+          <p:nvPr/>
+        </p:nvSpPr>
+        <p:spPr>
+          <a:xfrm>
+            <a:off x="457200" y="1850000"/>
+            <a:ext cx="11277295" cy="240000"/>
+          </a:xfrm>
+          <a:prstGeom prst="rect">
+            <a:avLst/>
+          </a:prstGeom>
+          <a:noFill/>
+        </p:spPr>
+        <p:txBody>
+          <a:bodyPr wrap="square">
+            <a:spAutoFit/>
+          </a:bodyPr>
+          <a:lstStyle/>
+          <a:p>
+            <a:pPr algn="l"/>
             <a:r>
               <a:rPr sz="1500" b="1" i="0">
                 <a:solidFill>
@@ -5586,28 +5255,66 @@
               <a:t>Q1</a:t>
             </a:r>
           </a:p>
-          <a:p>
-            <a:pPr>
-              <a:spcBef>
-                <a:spcPts val="400"/>
-              </a:spcBef>
-            </a:pPr>
-            <a:r>
-              <a:rPr sz="2000" b="1" i="0">
+        </p:txBody>
+      </p:sp>
+      <p:sp>
+        <p:nvSpPr>
+          <p:cNvPr id="7" name="TextBox 6"/>
+          <p:cNvSpPr txBox="1"/>
+          <p:nvPr/>
+        </p:nvSpPr>
+        <p:spPr>
+          <a:xfrm>
+            <a:off x="457200" y="2129263"/>
+            <a:ext cx="11277295" cy="308610"/>
+          </a:xfrm>
+          <a:prstGeom prst="rect">
+            <a:avLst/>
+          </a:prstGeom>
+          <a:noFill/>
+        </p:spPr>
+        <p:txBody>
+          <a:bodyPr wrap="square">
+            <a:spAutoFit/>
+          </a:bodyPr>
+          <a:lstStyle/>
+          <a:p>
+            <a:pPr algn="l"/>
+            <a:r>
+              <a:rPr sz="1800" b="1" i="0">
                 <a:solidFill>
                   <a:srgbClr val="000000"/>
                 </a:solidFill>
                 <a:latin typeface="Arial"/>
               </a:rPr>
-              <a:t>x − 7 = -10</a:t>
-            </a:r>
-          </a:p>
-          <a:p>
-            <a:pPr>
-              <a:spcBef>
-                <a:spcPts val="600"/>
-              </a:spcBef>
-            </a:pPr>
+              <a:t>Find a 15% service charge on a £64 bill, and the total bill.</a:t>
+            </a:r>
+          </a:p>
+        </p:txBody>
+      </p:sp>
+      <p:sp>
+        <p:nvSpPr>
+          <p:cNvPr id="8" name="TextBox 7"/>
+          <p:cNvSpPr txBox="1"/>
+          <p:nvPr/>
+        </p:nvSpPr>
+        <p:spPr>
+          <a:xfrm>
+            <a:off x="457200" y="2526216"/>
+            <a:ext cx="11277295" cy="274320"/>
+          </a:xfrm>
+          <a:prstGeom prst="rect">
+            <a:avLst/>
+          </a:prstGeom>
+          <a:noFill/>
+        </p:spPr>
+        <p:txBody>
+          <a:bodyPr wrap="square">
+            <a:spAutoFit/>
+          </a:bodyPr>
+          <a:lstStyle/>
+          <a:p>
+            <a:pPr algn="l"/>
             <a:r>
               <a:rPr sz="1600" b="1" i="0">
                 <a:solidFill>
@@ -5615,54 +5322,34 @@
                 </a:solidFill>
                 <a:latin typeface="Arial"/>
               </a:rPr>
-              <a:t>Answer: x = -3</a:t>
-            </a:r>
-          </a:p>
-        </p:txBody>
-      </p:sp>
-      <p:sp>
-        <p:nvSpPr>
-          <p:cNvPr id="7" name="Rounded Rectangle 6"/>
-          <p:cNvSpPr/>
-          <p:nvPr/>
-        </p:nvSpPr>
-        <p:spPr>
-          <a:xfrm>
-            <a:off x="6278727" y="1874519"/>
-            <a:ext cx="5455767" cy="2103120"/>
-          </a:xfrm>
-          <a:prstGeom prst="roundRect">
-            <a:avLst/>
-          </a:prstGeom>
-          <a:solidFill>
-            <a:srgbClr val="FFFFFF"/>
-          </a:solidFill>
-          <a:ln w="12700">
-            <a:solidFill>
-              <a:srgbClr val="BFBFBF"/>
-            </a:solidFill>
-          </a:ln>
-          <a:effectLst/>
-        </p:spPr>
-        <p:style>
-          <a:lnRef idx="1">
-            <a:schemeClr val="accent1"/>
-          </a:lnRef>
-          <a:fillRef idx="3">
-            <a:schemeClr val="accent1"/>
-          </a:fillRef>
-          <a:effectRef idx="2">
-            <a:schemeClr val="accent1"/>
-          </a:effectRef>
-          <a:fontRef idx="minor">
-            <a:schemeClr val="lt1"/>
-          </a:fontRef>
-        </p:style>
-        <p:txBody>
-          <a:bodyPr rtlCol="0" anchor="ctr" wrap="square" lIns="201168" rIns="201168" tIns="128016" bIns="73152"/>
-          <a:lstStyle/>
-          <a:p>
-            <a:pPr algn="ctr"/>
+              <a:t>Answer: £9.60 charge; total £73.60</a:t>
+            </a:r>
+          </a:p>
+        </p:txBody>
+      </p:sp>
+      <p:sp>
+        <p:nvSpPr>
+          <p:cNvPr id="9" name="TextBox 8"/>
+          <p:cNvSpPr txBox="1"/>
+          <p:nvPr/>
+        </p:nvSpPr>
+        <p:spPr>
+          <a:xfrm>
+            <a:off x="457200" y="3016486"/>
+            <a:ext cx="11277295" cy="240000"/>
+          </a:xfrm>
+          <a:prstGeom prst="rect">
+            <a:avLst/>
+          </a:prstGeom>
+          <a:noFill/>
+        </p:spPr>
+        <p:txBody>
+          <a:bodyPr wrap="square">
+            <a:spAutoFit/>
+          </a:bodyPr>
+          <a:lstStyle/>
+          <a:p>
+            <a:pPr algn="l"/>
             <a:r>
               <a:rPr sz="1500" b="1" i="0">
                 <a:solidFill>
@@ -5673,28 +5360,66 @@
               <a:t>Q2</a:t>
             </a:r>
           </a:p>
-          <a:p>
-            <a:pPr>
-              <a:spcBef>
-                <a:spcPts val="400"/>
-              </a:spcBef>
-            </a:pPr>
-            <a:r>
-              <a:rPr sz="2000" b="1" i="0">
+        </p:txBody>
+      </p:sp>
+      <p:sp>
+        <p:nvSpPr>
+          <p:cNvPr id="10" name="TextBox 9"/>
+          <p:cNvSpPr txBox="1"/>
+          <p:nvPr/>
+        </p:nvSpPr>
+        <p:spPr>
+          <a:xfrm>
+            <a:off x="457200" y="3295749"/>
+            <a:ext cx="11277295" cy="308610"/>
+          </a:xfrm>
+          <a:prstGeom prst="rect">
+            <a:avLst/>
+          </a:prstGeom>
+          <a:noFill/>
+        </p:spPr>
+        <p:txBody>
+          <a:bodyPr wrap="square">
+            <a:spAutoFit/>
+          </a:bodyPr>
+          <a:lstStyle/>
+          <a:p>
+            <a:pPr algn="l"/>
+            <a:r>
+              <a:rPr sz="1800" b="1" i="0">
                 <a:solidFill>
                   <a:srgbClr val="000000"/>
                 </a:solidFill>
                 <a:latin typeface="Arial"/>
               </a:rPr>
-              <a:t>3x + 5 = -4</a:t>
-            </a:r>
-          </a:p>
-          <a:p>
-            <a:pPr>
-              <a:spcBef>
-                <a:spcPts val="600"/>
-              </a:spcBef>
-            </a:pPr>
+              <a:t>Original price before 25% off if the sale price is £51.</a:t>
+            </a:r>
+          </a:p>
+        </p:txBody>
+      </p:sp>
+      <p:sp>
+        <p:nvSpPr>
+          <p:cNvPr id="11" name="TextBox 10"/>
+          <p:cNvSpPr txBox="1"/>
+          <p:nvPr/>
+        </p:nvSpPr>
+        <p:spPr>
+          <a:xfrm>
+            <a:off x="457200" y="3692702"/>
+            <a:ext cx="11277295" cy="274320"/>
+          </a:xfrm>
+          <a:prstGeom prst="rect">
+            <a:avLst/>
+          </a:prstGeom>
+          <a:noFill/>
+        </p:spPr>
+        <p:txBody>
+          <a:bodyPr wrap="square">
+            <a:spAutoFit/>
+          </a:bodyPr>
+          <a:lstStyle/>
+          <a:p>
+            <a:pPr algn="l"/>
             <a:r>
               <a:rPr sz="1600" b="1" i="0">
                 <a:solidFill>
@@ -5702,54 +5427,34 @@
                 </a:solidFill>
                 <a:latin typeface="Arial"/>
               </a:rPr>
-              <a:t>Answer: x = -3</a:t>
-            </a:r>
-          </a:p>
-        </p:txBody>
-      </p:sp>
-      <p:sp>
-        <p:nvSpPr>
-          <p:cNvPr id="8" name="Rounded Rectangle 7"/>
-          <p:cNvSpPr/>
-          <p:nvPr/>
-        </p:nvSpPr>
-        <p:spPr>
-          <a:xfrm>
-            <a:off x="457200" y="4160520"/>
-            <a:ext cx="5455767" cy="2103120"/>
-          </a:xfrm>
-          <a:prstGeom prst="roundRect">
-            <a:avLst/>
-          </a:prstGeom>
-          <a:solidFill>
-            <a:srgbClr val="FFFFFF"/>
-          </a:solidFill>
-          <a:ln w="12700">
-            <a:solidFill>
-              <a:srgbClr val="BFBFBF"/>
-            </a:solidFill>
-          </a:ln>
-          <a:effectLst/>
-        </p:spPr>
-        <p:style>
-          <a:lnRef idx="1">
-            <a:schemeClr val="accent1"/>
-          </a:lnRef>
-          <a:fillRef idx="3">
-            <a:schemeClr val="accent1"/>
-          </a:fillRef>
-          <a:effectRef idx="2">
-            <a:schemeClr val="accent1"/>
-          </a:effectRef>
-          <a:fontRef idx="minor">
-            <a:schemeClr val="lt1"/>
-          </a:fontRef>
-        </p:style>
-        <p:txBody>
-          <a:bodyPr rtlCol="0" anchor="ctr" wrap="square" lIns="201168" rIns="201168" tIns="128016" bIns="73152"/>
-          <a:lstStyle/>
-          <a:p>
-            <a:pPr algn="ctr"/>
+              <a:t>Answer: £68</a:t>
+            </a:r>
+          </a:p>
+        </p:txBody>
+      </p:sp>
+      <p:sp>
+        <p:nvSpPr>
+          <p:cNvPr id="12" name="TextBox 11"/>
+          <p:cNvSpPr txBox="1"/>
+          <p:nvPr/>
+        </p:nvSpPr>
+        <p:spPr>
+          <a:xfrm>
+            <a:off x="457200" y="4182972"/>
+            <a:ext cx="11277295" cy="240000"/>
+          </a:xfrm>
+          <a:prstGeom prst="rect">
+            <a:avLst/>
+          </a:prstGeom>
+          <a:noFill/>
+        </p:spPr>
+        <p:txBody>
+          <a:bodyPr wrap="square">
+            <a:spAutoFit/>
+          </a:bodyPr>
+          <a:lstStyle/>
+          <a:p>
+            <a:pPr algn="l"/>
             <a:r>
               <a:rPr sz="1500" b="1" i="0">
                 <a:solidFill>
@@ -5760,28 +5465,66 @@
               <a:t>Q3</a:t>
             </a:r>
           </a:p>
-          <a:p>
-            <a:pPr>
-              <a:spcBef>
-                <a:spcPts val="400"/>
-              </a:spcBef>
-            </a:pPr>
-            <a:r>
-              <a:rPr sz="2000" b="1" i="0">
+        </p:txBody>
+      </p:sp>
+      <p:sp>
+        <p:nvSpPr>
+          <p:cNvPr id="13" name="TextBox 12"/>
+          <p:cNvSpPr txBox="1"/>
+          <p:nvPr/>
+        </p:nvSpPr>
+        <p:spPr>
+          <a:xfrm>
+            <a:off x="457200" y="4462235"/>
+            <a:ext cx="11277295" cy="308610"/>
+          </a:xfrm>
+          <a:prstGeom prst="rect">
+            <a:avLst/>
+          </a:prstGeom>
+          <a:noFill/>
+        </p:spPr>
+        <p:txBody>
+          <a:bodyPr wrap="square">
+            <a:spAutoFit/>
+          </a:bodyPr>
+          <a:lstStyle/>
+          <a:p>
+            <a:pPr algn="l"/>
+            <a:r>
+              <a:rPr sz="1800" b="1" i="0">
                 <a:solidFill>
                   <a:srgbClr val="000000"/>
                 </a:solidFill>
                 <a:latin typeface="Arial"/>
               </a:rPr>
-              <a:t>2(x + 6) = 10</a:t>
-            </a:r>
-          </a:p>
-          <a:p>
-            <a:pPr>
-              <a:spcBef>
-                <a:spcPts val="600"/>
-              </a:spcBef>
-            </a:pPr>
+              <a:t>£600 at 3% simple interest for 4 years. Find the interest.</a:t>
+            </a:r>
+          </a:p>
+        </p:txBody>
+      </p:sp>
+      <p:sp>
+        <p:nvSpPr>
+          <p:cNvPr id="14" name="TextBox 13"/>
+          <p:cNvSpPr txBox="1"/>
+          <p:nvPr/>
+        </p:nvSpPr>
+        <p:spPr>
+          <a:xfrm>
+            <a:off x="457200" y="4859188"/>
+            <a:ext cx="11277295" cy="274320"/>
+          </a:xfrm>
+          <a:prstGeom prst="rect">
+            <a:avLst/>
+          </a:prstGeom>
+          <a:noFill/>
+        </p:spPr>
+        <p:txBody>
+          <a:bodyPr wrap="square">
+            <a:spAutoFit/>
+          </a:bodyPr>
+          <a:lstStyle/>
+          <a:p>
+            <a:pPr algn="l"/>
             <a:r>
               <a:rPr sz="1600" b="1" i="0">
                 <a:solidFill>
@@ -5789,54 +5532,34 @@
                 </a:solidFill>
                 <a:latin typeface="Arial"/>
               </a:rPr>
-              <a:t>Answer: x = -1</a:t>
-            </a:r>
-          </a:p>
-        </p:txBody>
-      </p:sp>
-      <p:sp>
-        <p:nvSpPr>
-          <p:cNvPr id="9" name="Rounded Rectangle 8"/>
-          <p:cNvSpPr/>
-          <p:nvPr/>
-        </p:nvSpPr>
-        <p:spPr>
-          <a:xfrm>
-            <a:off x="6278727" y="4160520"/>
-            <a:ext cx="5455767" cy="2103120"/>
-          </a:xfrm>
-          <a:prstGeom prst="roundRect">
-            <a:avLst/>
-          </a:prstGeom>
-          <a:solidFill>
-            <a:srgbClr val="FFFFFF"/>
-          </a:solidFill>
-          <a:ln w="12700">
-            <a:solidFill>
-              <a:srgbClr val="BFBFBF"/>
-            </a:solidFill>
-          </a:ln>
-          <a:effectLst/>
-        </p:spPr>
-        <p:style>
-          <a:lnRef idx="1">
-            <a:schemeClr val="accent1"/>
-          </a:lnRef>
-          <a:fillRef idx="3">
-            <a:schemeClr val="accent1"/>
-          </a:fillRef>
-          <a:effectRef idx="2">
-            <a:schemeClr val="accent1"/>
-          </a:effectRef>
-          <a:fontRef idx="minor">
-            <a:schemeClr val="lt1"/>
-          </a:fontRef>
-        </p:style>
-        <p:txBody>
-          <a:bodyPr rtlCol="0" anchor="ctr" wrap="square" lIns="201168" rIns="201168" tIns="128016" bIns="73152"/>
-          <a:lstStyle/>
-          <a:p>
-            <a:pPr algn="ctr"/>
+              <a:t>Answer: £72</a:t>
+            </a:r>
+          </a:p>
+        </p:txBody>
+      </p:sp>
+      <p:sp>
+        <p:nvSpPr>
+          <p:cNvPr id="15" name="TextBox 14"/>
+          <p:cNvSpPr txBox="1"/>
+          <p:nvPr/>
+        </p:nvSpPr>
+        <p:spPr>
+          <a:xfrm>
+            <a:off x="457200" y="5349458"/>
+            <a:ext cx="11277295" cy="240000"/>
+          </a:xfrm>
+          <a:prstGeom prst="rect">
+            <a:avLst/>
+          </a:prstGeom>
+          <a:noFill/>
+        </p:spPr>
+        <p:txBody>
+          <a:bodyPr wrap="square">
+            <a:spAutoFit/>
+          </a:bodyPr>
+          <a:lstStyle/>
+          <a:p>
+            <a:pPr algn="l"/>
             <a:r>
               <a:rPr sz="1500" b="1" i="0">
                 <a:solidFill>
@@ -5847,28 +5570,66 @@
               <a:t>Q4</a:t>
             </a:r>
           </a:p>
-          <a:p>
-            <a:pPr>
-              <a:spcBef>
-                <a:spcPts val="400"/>
-              </a:spcBef>
-            </a:pPr>
-            <a:r>
-              <a:rPr sz="2000" b="1" i="0">
+        </p:txBody>
+      </p:sp>
+      <p:sp>
+        <p:nvSpPr>
+          <p:cNvPr id="16" name="TextBox 15"/>
+          <p:cNvSpPr txBox="1"/>
+          <p:nvPr/>
+        </p:nvSpPr>
+        <p:spPr>
+          <a:xfrm>
+            <a:off x="457200" y="5628721"/>
+            <a:ext cx="11277295" cy="308610"/>
+          </a:xfrm>
+          <a:prstGeom prst="rect">
+            <a:avLst/>
+          </a:prstGeom>
+          <a:noFill/>
+        </p:spPr>
+        <p:txBody>
+          <a:bodyPr wrap="square">
+            <a:spAutoFit/>
+          </a:bodyPr>
+          <a:lstStyle/>
+          <a:p>
+            <a:pPr algn="l"/>
+            <a:r>
+              <a:rPr sz="1800" b="1" i="0">
                 <a:solidFill>
                   <a:srgbClr val="000000"/>
                 </a:solidFill>
                 <a:latin typeface="Arial"/>
               </a:rPr>
-              <a:t>-3x + 2 = 14</a:t>
-            </a:r>
-          </a:p>
-          <a:p>
-            <a:pPr>
-              <a:spcBef>
-                <a:spcPts val="600"/>
-              </a:spcBef>
-            </a:pPr>
+              <a:t>Express 21 out of 35 as a percentage.</a:t>
+            </a:r>
+          </a:p>
+        </p:txBody>
+      </p:sp>
+      <p:sp>
+        <p:nvSpPr>
+          <p:cNvPr id="17" name="TextBox 16"/>
+          <p:cNvSpPr txBox="1"/>
+          <p:nvPr/>
+        </p:nvSpPr>
+        <p:spPr>
+          <a:xfrm>
+            <a:off x="457200" y="6025674"/>
+            <a:ext cx="11277295" cy="274320"/>
+          </a:xfrm>
+          <a:prstGeom prst="rect">
+            <a:avLst/>
+          </a:prstGeom>
+          <a:noFill/>
+        </p:spPr>
+        <p:txBody>
+          <a:bodyPr wrap="square">
+            <a:spAutoFit/>
+          </a:bodyPr>
+          <a:lstStyle/>
+          <a:p>
+            <a:pPr algn="l"/>
             <a:r>
               <a:rPr sz="1600" b="1" i="0">
                 <a:solidFill>
@@ -5876,14 +5637,14 @@
                 </a:solidFill>
                 <a:latin typeface="Arial"/>
               </a:rPr>
-              <a:t>Answer: x = -4</a:t>
-            </a:r>
-          </a:p>
-        </p:txBody>
-      </p:sp>
-      <p:sp>
-        <p:nvSpPr>
-          <p:cNvPr id="10" name="TextBox 9"/>
+              <a:t>Answer: 60%</a:t>
+            </a:r>
+          </a:p>
+        </p:txBody>
+      </p:sp>
+      <p:sp>
+        <p:nvSpPr>
+          <p:cNvPr id="18" name="TextBox 17"/>
           <p:cNvSpPr txBox="1"/>
           <p:nvPr/>
         </p:nvSpPr>
@@ -5898,19 +5659,12 @@
           <a:noFill/>
         </p:spPr>
         <p:txBody>
-          <a:bodyPr wrap="square" anchor="t" lIns="0" rIns="0" tIns="0" bIns="0">
-            <a:spAutoFit/>
-          </a:bodyPr>
-          <a:lstStyle/>
-          <a:p>
-            <a:pPr algn="l">
-              <a:spcBef>
-                <a:spcPts val="0"/>
-              </a:spcBef>
-              <a:spcAft>
-                <a:spcPts val="800"/>
-              </a:spcAft>
-            </a:pPr>
+          <a:bodyPr wrap="square">
+            <a:spAutoFit/>
+          </a:bodyPr>
+          <a:lstStyle/>
+          <a:p>
+            <a:pPr algn="l"/>
             <a:r>
               <a:rPr sz="1100" b="0" i="0">
                 <a:solidFill>
@@ -5966,19 +5720,12 @@
           <a:noFill/>
         </p:spPr>
         <p:txBody>
-          <a:bodyPr wrap="square" anchor="t" lIns="0" rIns="0" tIns="0" bIns="0">
-            <a:spAutoFit/>
-          </a:bodyPr>
-          <a:lstStyle/>
-          <a:p>
-            <a:pPr algn="l">
-              <a:spcBef>
-                <a:spcPts val="0"/>
-              </a:spcBef>
-              <a:spcAft>
-                <a:spcPts val="800"/>
-              </a:spcAft>
-            </a:pPr>
+          <a:bodyPr wrap="square">
+            <a:spAutoFit/>
+          </a:bodyPr>
+          <a:lstStyle/>
+          <a:p>
+            <a:pPr algn="l"/>
             <a:r>
               <a:rPr sz="1500" b="1" i="0">
                 <a:solidFill>
@@ -6008,19 +5755,12 @@
           <a:noFill/>
         </p:spPr>
         <p:txBody>
-          <a:bodyPr wrap="square" anchor="t" lIns="0" rIns="0" tIns="0" bIns="0">
-            <a:spAutoFit/>
-          </a:bodyPr>
-          <a:lstStyle/>
-          <a:p>
-            <a:pPr algn="r">
-              <a:spcBef>
-                <a:spcPts val="0"/>
-              </a:spcBef>
-              <a:spcAft>
-                <a:spcPts val="800"/>
-              </a:spcAft>
-            </a:pPr>
+          <a:bodyPr wrap="square">
+            <a:spAutoFit/>
+          </a:bodyPr>
+          <a:lstStyle/>
+          <a:p>
+            <a:pPr algn="r"/>
             <a:r>
               <a:rPr sz="1300" b="0" i="0">
                 <a:solidFill>
@@ -6050,19 +5790,12 @@
           <a:noFill/>
         </p:spPr>
         <p:txBody>
-          <a:bodyPr wrap="square" anchor="t" lIns="0" rIns="0" tIns="0" bIns="0">
-            <a:spAutoFit/>
-          </a:bodyPr>
-          <a:lstStyle/>
-          <a:p>
-            <a:pPr algn="l">
-              <a:spcBef>
-                <a:spcPts val="0"/>
-              </a:spcBef>
-              <a:spcAft>
-                <a:spcPts val="800"/>
-              </a:spcAft>
-            </a:pPr>
+          <a:bodyPr wrap="square">
+            <a:spAutoFit/>
+          </a:bodyPr>
+          <a:lstStyle/>
+          <a:p>
+            <a:pPr algn="l"/>
             <a:r>
               <a:rPr sz="3400" b="1" i="0">
                 <a:solidFill>
@@ -6092,21 +5825,14 @@
           <a:noFill/>
         </p:spPr>
         <p:txBody>
-          <a:bodyPr wrap="square" anchor="t" lIns="0" rIns="0" tIns="0" bIns="0">
-            <a:spAutoFit/>
-          </a:bodyPr>
-          <a:lstStyle/>
-          <a:p>
-            <a:pPr algn="l">
-              <a:spcBef>
-                <a:spcPts val="0"/>
-              </a:spcBef>
-              <a:spcAft>
-                <a:spcPts val="800"/>
-              </a:spcAft>
-            </a:pPr>
-            <a:r>
-              <a:rPr sz="1600" b="0" i="1">
+          <a:bodyPr wrap="square">
+            <a:spAutoFit/>
+          </a:bodyPr>
+          <a:lstStyle/>
+          <a:p>
+            <a:pPr algn="l"/>
+            <a:r>
+              <a:rPr sz="1600" b="0" i="0">
                 <a:solidFill>
                   <a:srgbClr val="595959"/>
                 </a:solidFill>
@@ -6119,47 +5845,27 @@
       </p:sp>
       <p:sp>
         <p:nvSpPr>
-          <p:cNvPr id="6" name="Rounded Rectangle 5"/>
-          <p:cNvSpPr/>
-          <p:nvPr/>
-        </p:nvSpPr>
-        <p:spPr>
-          <a:xfrm>
-            <a:off x="457200" y="1965960"/>
-            <a:ext cx="11277295" cy="2057400"/>
-          </a:xfrm>
-          <a:prstGeom prst="roundRect">
-            <a:avLst/>
-          </a:prstGeom>
-          <a:solidFill>
-            <a:srgbClr val="F2F2F2"/>
-          </a:solidFill>
-          <a:ln w="9525">
-            <a:solidFill>
-              <a:srgbClr val="CCCCCC"/>
-            </a:solidFill>
-          </a:ln>
-          <a:effectLst/>
-        </p:spPr>
-        <p:style>
-          <a:lnRef idx="1">
-            <a:schemeClr val="accent1"/>
-          </a:lnRef>
-          <a:fillRef idx="3">
-            <a:schemeClr val="accent1"/>
-          </a:fillRef>
-          <a:effectRef idx="2">
-            <a:schemeClr val="accent1"/>
-          </a:effectRef>
-          <a:fontRef idx="minor">
-            <a:schemeClr val="lt1"/>
-          </a:fontRef>
-        </p:style>
-        <p:txBody>
-          <a:bodyPr rtlCol="0" anchor="ctr" wrap="square" lIns="256032" rIns="256032" tIns="128016" bIns="73152"/>
-          <a:lstStyle/>
-          <a:p>
-            <a:pPr algn="ctr"/>
+          <p:cNvPr id="6" name="TextBox 5"/>
+          <p:cNvSpPr txBox="1"/>
+          <p:nvPr/>
+        </p:nvSpPr>
+        <p:spPr>
+          <a:xfrm>
+            <a:off x="457200" y="1950000"/>
+            <a:ext cx="11277295" cy="240000"/>
+          </a:xfrm>
+          <a:prstGeom prst="rect">
+            <a:avLst/>
+          </a:prstGeom>
+          <a:noFill/>
+        </p:spPr>
+        <p:txBody>
+          <a:bodyPr wrap="square">
+            <a:spAutoFit/>
+          </a:bodyPr>
+          <a:lstStyle/>
+          <a:p>
+            <a:pPr algn="l"/>
             <a:r>
               <a:rPr sz="1500" b="1" i="0">
                 <a:solidFill>
@@ -6170,28 +5876,66 @@
               <a:t>Challenge 1</a:t>
             </a:r>
           </a:p>
-          <a:p>
-            <a:pPr>
-              <a:spcBef>
-                <a:spcPts val="400"/>
-              </a:spcBef>
-            </a:pPr>
-            <a:r>
-              <a:rPr sz="1900" b="0" i="0">
+        </p:txBody>
+      </p:sp>
+      <p:sp>
+        <p:nvSpPr>
+          <p:cNvPr id="7" name="TextBox 6"/>
+          <p:cNvSpPr txBox="1"/>
+          <p:nvPr/>
+        </p:nvSpPr>
+        <p:spPr>
+          <a:xfrm>
+            <a:off x="457200" y="2230000"/>
+            <a:ext cx="11277295" cy="325755"/>
+          </a:xfrm>
+          <a:prstGeom prst="rect">
+            <a:avLst/>
+          </a:prstGeom>
+          <a:noFill/>
+        </p:spPr>
+        <p:txBody>
+          <a:bodyPr wrap="square">
+            <a:spAutoFit/>
+          </a:bodyPr>
+          <a:lstStyle/>
+          <a:p>
+            <a:pPr algn="l"/>
+            <a:r>
+              <a:rPr sz="1900" b="1" i="0">
                 <a:solidFill>
                   <a:srgbClr val="000000"/>
                 </a:solidFill>
                 <a:latin typeface="Arial"/>
               </a:rPr>
-              <a:t>5(x − 2) = -15</a:t>
-            </a:r>
-          </a:p>
-          <a:p>
-            <a:pPr>
-              <a:spcBef>
-                <a:spcPts val="600"/>
-              </a:spcBef>
-            </a:pPr>
+              <a:t>A £2,500 investment grows at 4% compound interest for 3 years. Find its value.</a:t>
+            </a:r>
+          </a:p>
+        </p:txBody>
+      </p:sp>
+      <p:sp>
+        <p:nvSpPr>
+          <p:cNvPr id="8" name="TextBox 7"/>
+          <p:cNvSpPr txBox="1"/>
+          <p:nvPr/>
+        </p:nvSpPr>
+        <p:spPr>
+          <a:xfrm>
+            <a:off x="457200" y="2645755"/>
+            <a:ext cx="11277295" cy="274320"/>
+          </a:xfrm>
+          <a:prstGeom prst="rect">
+            <a:avLst/>
+          </a:prstGeom>
+          <a:noFill/>
+        </p:spPr>
+        <p:txBody>
+          <a:bodyPr wrap="square">
+            <a:spAutoFit/>
+          </a:bodyPr>
+          <a:lstStyle/>
+          <a:p>
+            <a:pPr algn="l"/>
             <a:r>
               <a:rPr sz="1600" b="1" i="0">
                 <a:solidFill>
@@ -6199,54 +5943,34 @@
                 </a:solidFill>
                 <a:latin typeface="Arial"/>
               </a:rPr>
-              <a:t>Answer: x = -1</a:t>
-            </a:r>
-          </a:p>
-        </p:txBody>
-      </p:sp>
-      <p:sp>
-        <p:nvSpPr>
-          <p:cNvPr id="7" name="Rounded Rectangle 6"/>
-          <p:cNvSpPr/>
-          <p:nvPr/>
-        </p:nvSpPr>
-        <p:spPr>
-          <a:xfrm>
-            <a:off x="457200" y="4206240"/>
-            <a:ext cx="11277295" cy="2057400"/>
-          </a:xfrm>
-          <a:prstGeom prst="roundRect">
-            <a:avLst/>
-          </a:prstGeom>
-          <a:solidFill>
-            <a:srgbClr val="F2F2F2"/>
-          </a:solidFill>
-          <a:ln w="9525">
-            <a:solidFill>
-              <a:srgbClr val="CCCCCC"/>
-            </a:solidFill>
-          </a:ln>
-          <a:effectLst/>
-        </p:spPr>
-        <p:style>
-          <a:lnRef idx="1">
-            <a:schemeClr val="accent1"/>
-          </a:lnRef>
-          <a:fillRef idx="3">
-            <a:schemeClr val="accent1"/>
-          </a:fillRef>
-          <a:effectRef idx="2">
-            <a:schemeClr val="accent1"/>
-          </a:effectRef>
-          <a:fontRef idx="minor">
-            <a:schemeClr val="lt1"/>
-          </a:fontRef>
-        </p:style>
-        <p:txBody>
-          <a:bodyPr rtlCol="0" anchor="ctr" wrap="square" lIns="256032" rIns="256032" tIns="128016" bIns="73152"/>
-          <a:lstStyle/>
-          <a:p>
-            <a:pPr algn="ctr"/>
+              <a:t>Answer: £2,812.16</a:t>
+            </a:r>
+          </a:p>
+        </p:txBody>
+      </p:sp>
+      <p:sp>
+        <p:nvSpPr>
+          <p:cNvPr id="9" name="TextBox 8"/>
+          <p:cNvSpPr txBox="1"/>
+          <p:nvPr/>
+        </p:nvSpPr>
+        <p:spPr>
+          <a:xfrm>
+            <a:off x="457200" y="3140075"/>
+            <a:ext cx="11277295" cy="240000"/>
+          </a:xfrm>
+          <a:prstGeom prst="rect">
+            <a:avLst/>
+          </a:prstGeom>
+          <a:noFill/>
+        </p:spPr>
+        <p:txBody>
+          <a:bodyPr wrap="square">
+            <a:spAutoFit/>
+          </a:bodyPr>
+          <a:lstStyle/>
+          <a:p>
+            <a:pPr algn="l"/>
             <a:r>
               <a:rPr sz="1500" b="1" i="0">
                 <a:solidFill>
@@ -6257,28 +5981,66 @@
               <a:t>Challenge 2</a:t>
             </a:r>
           </a:p>
-          <a:p>
-            <a:pPr>
-              <a:spcBef>
-                <a:spcPts val="400"/>
-              </a:spcBef>
-            </a:pPr>
-            <a:r>
-              <a:rPr sz="1900" b="0" i="0">
+        </p:txBody>
+      </p:sp>
+      <p:sp>
+        <p:nvSpPr>
+          <p:cNvPr id="10" name="TextBox 9"/>
+          <p:cNvSpPr txBox="1"/>
+          <p:nvPr/>
+        </p:nvSpPr>
+        <p:spPr>
+          <a:xfrm>
+            <a:off x="457200" y="3420075"/>
+            <a:ext cx="11277295" cy="651510"/>
+          </a:xfrm>
+          <a:prstGeom prst="rect">
+            <a:avLst/>
+          </a:prstGeom>
+          <a:noFill/>
+        </p:spPr>
+        <p:txBody>
+          <a:bodyPr wrap="square">
+            <a:spAutoFit/>
+          </a:bodyPr>
+          <a:lstStyle/>
+          <a:p>
+            <a:pPr algn="l"/>
+            <a:r>
+              <a:rPr sz="1900" b="1" i="0">
                 <a:solidFill>
                   <a:srgbClr val="000000"/>
                 </a:solidFill>
                 <a:latin typeface="Arial"/>
               </a:rPr>
-              <a:t>-4x − 6 = 10</a:t>
-            </a:r>
-          </a:p>
-          <a:p>
-            <a:pPr>
-              <a:spcBef>
-                <a:spcPts val="600"/>
-              </a:spcBef>
-            </a:pPr>
+              <a:t>A meal costs £46 including a 15% service charge, then a 10% discount voucher is applied to that total. Find the final price.</a:t>
+            </a:r>
+          </a:p>
+        </p:txBody>
+      </p:sp>
+      <p:sp>
+        <p:nvSpPr>
+          <p:cNvPr id="11" name="TextBox 10"/>
+          <p:cNvSpPr txBox="1"/>
+          <p:nvPr/>
+        </p:nvSpPr>
+        <p:spPr>
+          <a:xfrm>
+            <a:off x="457200" y="4161585"/>
+            <a:ext cx="11277295" cy="274320"/>
+          </a:xfrm>
+          <a:prstGeom prst="rect">
+            <a:avLst/>
+          </a:prstGeom>
+          <a:noFill/>
+        </p:spPr>
+        <p:txBody>
+          <a:bodyPr wrap="square">
+            <a:spAutoFit/>
+          </a:bodyPr>
+          <a:lstStyle/>
+          <a:p>
+            <a:pPr algn="l"/>
             <a:r>
               <a:rPr sz="1600" b="1" i="0">
                 <a:solidFill>
@@ -6286,14 +6048,14 @@
                 </a:solidFill>
                 <a:latin typeface="Arial"/>
               </a:rPr>
-              <a:t>Answer: x = -4</a:t>
-            </a:r>
-          </a:p>
-        </p:txBody>
-      </p:sp>
-      <p:sp>
-        <p:nvSpPr>
-          <p:cNvPr id="8" name="TextBox 7"/>
+              <a:t>Answer: £41.40</a:t>
+            </a:r>
+          </a:p>
+        </p:txBody>
+      </p:sp>
+      <p:sp>
+        <p:nvSpPr>
+          <p:cNvPr id="12" name="TextBox 11"/>
           <p:cNvSpPr txBox="1"/>
           <p:nvPr/>
         </p:nvSpPr>
@@ -6308,19 +6070,12 @@
           <a:noFill/>
         </p:spPr>
         <p:txBody>
-          <a:bodyPr wrap="square" anchor="t" lIns="0" rIns="0" tIns="0" bIns="0">
-            <a:spAutoFit/>
-          </a:bodyPr>
-          <a:lstStyle/>
-          <a:p>
-            <a:pPr algn="l">
-              <a:spcBef>
-                <a:spcPts val="0"/>
-              </a:spcBef>
-              <a:spcAft>
-                <a:spcPts val="800"/>
-              </a:spcAft>
-            </a:pPr>
+          <a:bodyPr wrap="square">
+            <a:spAutoFit/>
+          </a:bodyPr>
+          <a:lstStyle/>
+          <a:p>
+            <a:pPr algn="l"/>
             <a:r>
               <a:rPr sz="1100" b="0" i="0">
                 <a:solidFill>
@@ -6328,7 +6083,7 @@
                 </a:solidFill>
                 <a:latin typeface="Arial"/>
               </a:rPr>
-              <a:t>Y8 Solving Linear Equations — Lower-to-Middle Set</a:t>
+              <a:t>Y8 Percentages and Proportionality — Middle Set</a:t>
             </a:r>
           </a:p>
         </p:txBody>
@@ -6376,19 +6131,12 @@
           <a:noFill/>
         </p:spPr>
         <p:txBody>
-          <a:bodyPr wrap="square" anchor="t" lIns="0" rIns="0" tIns="0" bIns="0">
-            <a:spAutoFit/>
-          </a:bodyPr>
-          <a:lstStyle/>
-          <a:p>
-            <a:pPr algn="l">
-              <a:spcBef>
-                <a:spcPts val="0"/>
-              </a:spcBef>
-              <a:spcAft>
-                <a:spcPts val="800"/>
-              </a:spcAft>
-            </a:pPr>
+          <a:bodyPr wrap="square">
+            <a:spAutoFit/>
+          </a:bodyPr>
+          <a:lstStyle/>
+          <a:p>
+            <a:pPr algn="l"/>
             <a:r>
               <a:rPr sz="1500" b="1" i="0">
                 <a:solidFill>
@@ -6418,19 +6166,12 @@
           <a:noFill/>
         </p:spPr>
         <p:txBody>
-          <a:bodyPr wrap="square" anchor="t" lIns="0" rIns="0" tIns="0" bIns="0">
-            <a:spAutoFit/>
-          </a:bodyPr>
-          <a:lstStyle/>
-          <a:p>
-            <a:pPr algn="r">
-              <a:spcBef>
-                <a:spcPts val="0"/>
-              </a:spcBef>
-              <a:spcAft>
-                <a:spcPts val="800"/>
-              </a:spcAft>
-            </a:pPr>
+          <a:bodyPr wrap="square">
+            <a:spAutoFit/>
+          </a:bodyPr>
+          <a:lstStyle/>
+          <a:p>
+            <a:pPr algn="r"/>
             <a:r>
               <a:rPr sz="1300" b="0" i="0">
                 <a:solidFill>
@@ -6451,28 +6192,21 @@
         </p:nvSpPr>
         <p:spPr>
           <a:xfrm>
-            <a:off x="457200" y="685800"/>
-            <a:ext cx="11277295" cy="457200"/>
-          </a:xfrm>
-          <a:prstGeom prst="rect">
-            <a:avLst/>
-          </a:prstGeom>
-          <a:noFill/>
-        </p:spPr>
-        <p:txBody>
-          <a:bodyPr wrap="square" anchor="t" lIns="0" rIns="0" tIns="0" bIns="0">
-            <a:spAutoFit/>
-          </a:bodyPr>
-          <a:lstStyle/>
-          <a:p>
-            <a:pPr algn="l">
-              <a:spcBef>
-                <a:spcPts val="0"/>
-              </a:spcBef>
-              <a:spcAft>
-                <a:spcPts val="800"/>
-              </a:spcAft>
-            </a:pPr>
+            <a:off x="457200" y="777240"/>
+            <a:ext cx="11277295" cy="450000"/>
+          </a:xfrm>
+          <a:prstGeom prst="rect">
+            <a:avLst/>
+          </a:prstGeom>
+          <a:noFill/>
+        </p:spPr>
+        <p:txBody>
+          <a:bodyPr wrap="square">
+            <a:spAutoFit/>
+          </a:bodyPr>
+          <a:lstStyle/>
+          <a:p>
+            <a:pPr algn="l"/>
             <a:r>
               <a:rPr sz="2800" b="1" i="0">
                 <a:solidFill>
@@ -6480,7 +6214,7 @@
                 </a:solidFill>
                 <a:latin typeface="Arial"/>
               </a:rPr>
-              <a:t>Family Sort Race</a:t>
+              <a:t>Real-Life Relay</a:t>
             </a:r>
           </a:p>
         </p:txBody>
@@ -6493,36 +6227,29 @@
         </p:nvSpPr>
         <p:spPr>
           <a:xfrm>
-            <a:off x="457200" y="1170432"/>
-            <a:ext cx="11277295" cy="502920"/>
-          </a:xfrm>
-          <a:prstGeom prst="rect">
-            <a:avLst/>
-          </a:prstGeom>
-          <a:noFill/>
-        </p:spPr>
-        <p:txBody>
-          <a:bodyPr wrap="square" anchor="t" lIns="0" rIns="0" tIns="0" bIns="0">
-            <a:spAutoFit/>
-          </a:bodyPr>
-          <a:lstStyle/>
-          <a:p>
-            <a:pPr algn="l">
-              <a:spcBef>
-                <a:spcPts val="0"/>
-              </a:spcBef>
-              <a:spcAft>
-                <a:spcPts val="0"/>
-              </a:spcAft>
-            </a:pPr>
-            <a:r>
-              <a:rPr sz="1300" b="0" i="1">
+            <a:off x="457200" y="1300000"/>
+            <a:ext cx="11277295" cy="500000"/>
+          </a:xfrm>
+          <a:prstGeom prst="rect">
+            <a:avLst/>
+          </a:prstGeom>
+          <a:noFill/>
+        </p:spPr>
+        <p:txBody>
+          <a:bodyPr wrap="square">
+            <a:spAutoFit/>
+          </a:bodyPr>
+          <a:lstStyle/>
+          <a:p>
+            <a:pPr algn="l"/>
+            <a:r>
+              <a:rPr sz="1300" b="0" i="0">
                 <a:solidFill>
                   <a:srgbClr val="595959"/>
                 </a:solidFill>
                 <a:latin typeface="Arial"/>
               </a:rPr>
-              <a:t>Card set — sort into 'one-step', 'two-step', 'bracket' piles, then solve one from each pile.</a:t>
+              <a:t>Mixed real-life relay covering weeks 1–3. Read each question; students choose the correct method.</a:t>
             </a:r>
           </a:p>
         </p:txBody>
@@ -6535,408 +6262,555 @@
         </p:nvSpPr>
         <p:spPr>
           <a:xfrm>
-            <a:off x="457200" y="1874519"/>
-            <a:ext cx="5455767" cy="971550"/>
-          </a:xfrm>
-          <a:prstGeom prst="rect">
-            <a:avLst/>
-          </a:prstGeom>
-          <a:noFill/>
-        </p:spPr>
-        <p:txBody>
-          <a:bodyPr wrap="square" anchor="ctr" lIns="0" rIns="0" tIns="0" bIns="0">
+            <a:off x="457200" y="1750000"/>
+            <a:ext cx="2000000" cy="250000"/>
+          </a:xfrm>
+          <a:prstGeom prst="rect">
+            <a:avLst/>
+          </a:prstGeom>
+          <a:noFill/>
+        </p:spPr>
+        <p:txBody>
+          <a:bodyPr wrap="square">
             <a:spAutoFit/>
           </a:bodyPr>
           <a:lstStyle/>
           <a:p>
             <a:pPr algn="l"/>
             <a:r>
+              <a:rPr sz="1300" b="1" i="0">
+                <a:solidFill>
+                  <a:srgbClr val="595959"/>
+                </a:solidFill>
+                <a:latin typeface="Arial"/>
+              </a:rPr>
+              <a:t>Grid numbers:</a:t>
+            </a:r>
+          </a:p>
+        </p:txBody>
+      </p:sp>
+      <p:sp>
+        <p:nvSpPr>
+          <p:cNvPr id="7" name="TextBox 6"/>
+          <p:cNvSpPr txBox="1"/>
+          <p:nvPr/>
+        </p:nvSpPr>
+        <p:spPr>
+          <a:xfrm>
+            <a:off x="2457200" y="1750000"/>
+            <a:ext cx="900000" cy="250000"/>
+          </a:xfrm>
+          <a:prstGeom prst="rect">
+            <a:avLst/>
+          </a:prstGeom>
+          <a:noFill/>
+        </p:spPr>
+        <p:txBody>
+          <a:bodyPr wrap="square">
+            <a:spAutoFit/>
+          </a:bodyPr>
+          <a:lstStyle/>
+          <a:p>
+            <a:pPr algn="l"/>
+            <a:r>
               <a:rPr sz="1500" b="1" i="0">
                 <a:solidFill>
                   <a:srgbClr val="000000"/>
                 </a:solidFill>
                 <a:latin typeface="Arial"/>
               </a:rPr>
-              <a:t>1. x − 8 = -15   </a:t>
-            </a:r>
+              <a:t>9.6</a:t>
+            </a:r>
+          </a:p>
+        </p:txBody>
+      </p:sp>
+      <p:sp>
+        <p:nvSpPr>
+          <p:cNvPr id="8" name="TextBox 7"/>
+          <p:cNvSpPr txBox="1"/>
+          <p:nvPr/>
+        </p:nvSpPr>
+        <p:spPr>
+          <a:xfrm>
+            <a:off x="3407200" y="1750000"/>
+            <a:ext cx="900000" cy="250000"/>
+          </a:xfrm>
+          <a:prstGeom prst="rect">
+            <a:avLst/>
+          </a:prstGeom>
+          <a:noFill/>
+        </p:spPr>
+        <p:txBody>
+          <a:bodyPr wrap="square">
+            <a:spAutoFit/>
+          </a:bodyPr>
+          <a:lstStyle/>
+          <a:p>
+            <a:pPr algn="l"/>
             <a:r>
               <a:rPr sz="1500" b="1" i="0">
                 <a:solidFill>
+                  <a:srgbClr val="000000"/>
+                </a:solidFill>
+                <a:latin typeface="Arial"/>
+              </a:rPr>
+              <a:t>68</a:t>
+            </a:r>
+          </a:p>
+        </p:txBody>
+      </p:sp>
+      <p:sp>
+        <p:nvSpPr>
+          <p:cNvPr id="9" name="TextBox 8"/>
+          <p:cNvSpPr txBox="1"/>
+          <p:nvPr/>
+        </p:nvSpPr>
+        <p:spPr>
+          <a:xfrm>
+            <a:off x="4357200" y="1750000"/>
+            <a:ext cx="900000" cy="250000"/>
+          </a:xfrm>
+          <a:prstGeom prst="rect">
+            <a:avLst/>
+          </a:prstGeom>
+          <a:noFill/>
+        </p:spPr>
+        <p:txBody>
+          <a:bodyPr wrap="square">
+            <a:spAutoFit/>
+          </a:bodyPr>
+          <a:lstStyle/>
+          <a:p>
+            <a:pPr algn="l"/>
+            <a:r>
+              <a:rPr sz="1500" b="1" i="0">
+                <a:solidFill>
+                  <a:srgbClr val="000000"/>
+                </a:solidFill>
+                <a:latin typeface="Arial"/>
+              </a:rPr>
+              <a:t>72</a:t>
+            </a:r>
+          </a:p>
+        </p:txBody>
+      </p:sp>
+      <p:sp>
+        <p:nvSpPr>
+          <p:cNvPr id="10" name="TextBox 9"/>
+          <p:cNvSpPr txBox="1"/>
+          <p:nvPr/>
+        </p:nvSpPr>
+        <p:spPr>
+          <a:xfrm>
+            <a:off x="5307200" y="1750000"/>
+            <a:ext cx="900000" cy="250000"/>
+          </a:xfrm>
+          <a:prstGeom prst="rect">
+            <a:avLst/>
+          </a:prstGeom>
+          <a:noFill/>
+        </p:spPr>
+        <p:txBody>
+          <a:bodyPr wrap="square">
+            <a:spAutoFit/>
+          </a:bodyPr>
+          <a:lstStyle/>
+          <a:p>
+            <a:pPr algn="l"/>
+            <a:r>
+              <a:rPr sz="1500" b="1" i="0">
+                <a:solidFill>
+                  <a:srgbClr val="000000"/>
+                </a:solidFill>
+                <a:latin typeface="Arial"/>
+              </a:rPr>
+              <a:t>60</a:t>
+            </a:r>
+          </a:p>
+        </p:txBody>
+      </p:sp>
+      <p:sp>
+        <p:nvSpPr>
+          <p:cNvPr id="11" name="TextBox 10"/>
+          <p:cNvSpPr txBox="1"/>
+          <p:nvPr/>
+        </p:nvSpPr>
+        <p:spPr>
+          <a:xfrm>
+            <a:off x="457200" y="2150000"/>
+            <a:ext cx="5450000" cy="330000"/>
+          </a:xfrm>
+          <a:prstGeom prst="rect">
+            <a:avLst/>
+          </a:prstGeom>
+          <a:noFill/>
+        </p:spPr>
+        <p:txBody>
+          <a:bodyPr wrap="square">
+            <a:spAutoFit/>
+          </a:bodyPr>
+          <a:lstStyle/>
+          <a:p>
+            <a:r>
+              <a:rPr sz="1500" b="1">
+                <a:solidFill>
+                  <a:srgbClr val="000000"/>
+                </a:solidFill>
+                <a:latin typeface="Arial"/>
+              </a:rPr>
+              <a:t>1. 15% charge on £40 bill?   </a:t>
+            </a:r>
+            <a:r>
+              <a:rPr sz="1500" b="1">
+                <a:solidFill>
                   <a:srgbClr val="2B6B3D"/>
                 </a:solidFill>
                 <a:latin typeface="Arial"/>
               </a:rPr>
-              <a:t>one-step; x = -7</a:t>
-            </a:r>
-          </a:p>
-        </p:txBody>
-      </p:sp>
-      <p:sp>
-        <p:nvSpPr>
-          <p:cNvPr id="7" name="TextBox 6"/>
-          <p:cNvSpPr txBox="1"/>
-          <p:nvPr/>
-        </p:nvSpPr>
-        <p:spPr>
-          <a:xfrm>
-            <a:off x="457200" y="2846069"/>
-            <a:ext cx="5455767" cy="971550"/>
-          </a:xfrm>
-          <a:prstGeom prst="rect">
-            <a:avLst/>
-          </a:prstGeom>
-          <a:noFill/>
-        </p:spPr>
-        <p:txBody>
-          <a:bodyPr wrap="square" anchor="ctr" lIns="0" rIns="0" tIns="0" bIns="0">
+              <a:t>£6</a:t>
+            </a:r>
+          </a:p>
+        </p:txBody>
+      </p:sp>
+      <p:sp>
+        <p:nvSpPr>
+          <p:cNvPr id="12" name="TextBox 11"/>
+          <p:cNvSpPr txBox="1"/>
+          <p:nvPr/>
+        </p:nvSpPr>
+        <p:spPr>
+          <a:xfrm>
+            <a:off x="457200" y="2480000"/>
+            <a:ext cx="5450000" cy="330000"/>
+          </a:xfrm>
+          <a:prstGeom prst="rect">
+            <a:avLst/>
+          </a:prstGeom>
+          <a:noFill/>
+        </p:spPr>
+        <p:txBody>
+          <a:bodyPr wrap="square">
+            <a:spAutoFit/>
+          </a:bodyPr>
+          <a:lstStyle/>
+          <a:p>
+            <a:r>
+              <a:rPr sz="1500" b="1">
+                <a:solidFill>
+                  <a:srgbClr val="000000"/>
+                </a:solidFill>
+                <a:latin typeface="Arial"/>
+              </a:rPr>
+              <a:t>2. Original price if £54 is after 10% off?   </a:t>
+            </a:r>
+            <a:r>
+              <a:rPr sz="1500" b="1">
+                <a:solidFill>
+                  <a:srgbClr val="2B6B3D"/>
+                </a:solidFill>
+                <a:latin typeface="Arial"/>
+              </a:rPr>
+              <a:t>£60</a:t>
+            </a:r>
+          </a:p>
+        </p:txBody>
+      </p:sp>
+      <p:sp>
+        <p:nvSpPr>
+          <p:cNvPr id="13" name="TextBox 12"/>
+          <p:cNvSpPr txBox="1"/>
+          <p:nvPr/>
+        </p:nvSpPr>
+        <p:spPr>
+          <a:xfrm>
+            <a:off x="457200" y="2810000"/>
+            <a:ext cx="5450000" cy="330000"/>
+          </a:xfrm>
+          <a:prstGeom prst="rect">
+            <a:avLst/>
+          </a:prstGeom>
+          <a:noFill/>
+        </p:spPr>
+        <p:txBody>
+          <a:bodyPr wrap="square">
+            <a:spAutoFit/>
+          </a:bodyPr>
+          <a:lstStyle/>
+          <a:p>
+            <a:r>
+              <a:rPr sz="1500" b="1">
+                <a:solidFill>
+                  <a:srgbClr val="000000"/>
+                </a:solidFill>
+                <a:latin typeface="Arial"/>
+              </a:rPr>
+              <a:t>3. £400 simple interest at 5%, 3 yrs?   </a:t>
+            </a:r>
+            <a:r>
+              <a:rPr sz="1500" b="1">
+                <a:solidFill>
+                  <a:srgbClr val="2B6B3D"/>
+                </a:solidFill>
+                <a:latin typeface="Arial"/>
+              </a:rPr>
+              <a:t>£60</a:t>
+            </a:r>
+          </a:p>
+        </p:txBody>
+      </p:sp>
+      <p:sp>
+        <p:nvSpPr>
+          <p:cNvPr id="14" name="TextBox 13"/>
+          <p:cNvSpPr txBox="1"/>
+          <p:nvPr/>
+        </p:nvSpPr>
+        <p:spPr>
+          <a:xfrm>
+            <a:off x="457200" y="3140000"/>
+            <a:ext cx="5450000" cy="330000"/>
+          </a:xfrm>
+          <a:prstGeom prst="rect">
+            <a:avLst/>
+          </a:prstGeom>
+          <a:noFill/>
+        </p:spPr>
+        <p:txBody>
+          <a:bodyPr wrap="square">
+            <a:spAutoFit/>
+          </a:bodyPr>
+          <a:lstStyle/>
+          <a:p>
+            <a:r>
+              <a:rPr sz="1500" b="1">
+                <a:solidFill>
+                  <a:srgbClr val="000000"/>
+                </a:solidFill>
+                <a:latin typeface="Arial"/>
+              </a:rPr>
+              <a:t>4. 18 out of 24 as a %?   </a:t>
+            </a:r>
+            <a:r>
+              <a:rPr sz="1500" b="1">
+                <a:solidFill>
+                  <a:srgbClr val="2B6B3D"/>
+                </a:solidFill>
+                <a:latin typeface="Arial"/>
+              </a:rPr>
+              <a:t>75%</a:t>
+            </a:r>
+          </a:p>
+        </p:txBody>
+      </p:sp>
+      <p:sp>
+        <p:nvSpPr>
+          <p:cNvPr id="15" name="TextBox 14"/>
+          <p:cNvSpPr txBox="1"/>
+          <p:nvPr/>
+        </p:nvSpPr>
+        <p:spPr>
+          <a:xfrm>
+            <a:off x="6284495" y="2150000"/>
+            <a:ext cx="5450000" cy="330000"/>
+          </a:xfrm>
+          <a:prstGeom prst="rect">
+            <a:avLst/>
+          </a:prstGeom>
+          <a:noFill/>
+        </p:spPr>
+        <p:txBody>
+          <a:bodyPr wrap="square">
+            <a:spAutoFit/>
+          </a:bodyPr>
+          <a:lstStyle/>
+          <a:p>
+            <a:r>
+              <a:rPr sz="1500" b="1">
+                <a:solidFill>
+                  <a:srgbClr val="000000"/>
+                </a:solidFill>
+                <a:latin typeface="Arial"/>
+              </a:rPr>
+              <a:t>5. 20% charge on £80 bill?   </a:t>
+            </a:r>
+            <a:r>
+              <a:rPr sz="1500" b="1">
+                <a:solidFill>
+                  <a:srgbClr val="2B6B3D"/>
+                </a:solidFill>
+                <a:latin typeface="Arial"/>
+              </a:rPr>
+              <a:t>£16</a:t>
+            </a:r>
+          </a:p>
+        </p:txBody>
+      </p:sp>
+      <p:sp>
+        <p:nvSpPr>
+          <p:cNvPr id="16" name="TextBox 15"/>
+          <p:cNvSpPr txBox="1"/>
+          <p:nvPr/>
+        </p:nvSpPr>
+        <p:spPr>
+          <a:xfrm>
+            <a:off x="6284495" y="2480000"/>
+            <a:ext cx="5450000" cy="330000"/>
+          </a:xfrm>
+          <a:prstGeom prst="rect">
+            <a:avLst/>
+          </a:prstGeom>
+          <a:noFill/>
+        </p:spPr>
+        <p:txBody>
+          <a:bodyPr wrap="square">
+            <a:spAutoFit/>
+          </a:bodyPr>
+          <a:lstStyle/>
+          <a:p>
+            <a:r>
+              <a:rPr sz="1500" b="1">
+                <a:solidFill>
+                  <a:srgbClr val="000000"/>
+                </a:solidFill>
+                <a:latin typeface="Arial"/>
+              </a:rPr>
+              <a:t>6. Original price if £76 is after 5% off?   </a:t>
+            </a:r>
+            <a:r>
+              <a:rPr sz="1500" b="1">
+                <a:solidFill>
+                  <a:srgbClr val="2B6B3D"/>
+                </a:solidFill>
+                <a:latin typeface="Arial"/>
+              </a:rPr>
+              <a:t>£80</a:t>
+            </a:r>
+          </a:p>
+        </p:txBody>
+      </p:sp>
+      <p:sp>
+        <p:nvSpPr>
+          <p:cNvPr id="17" name="TextBox 16"/>
+          <p:cNvSpPr txBox="1"/>
+          <p:nvPr/>
+        </p:nvSpPr>
+        <p:spPr>
+          <a:xfrm>
+            <a:off x="6284495" y="2810000"/>
+            <a:ext cx="5450000" cy="330000"/>
+          </a:xfrm>
+          <a:prstGeom prst="rect">
+            <a:avLst/>
+          </a:prstGeom>
+          <a:noFill/>
+        </p:spPr>
+        <p:txBody>
+          <a:bodyPr wrap="square">
+            <a:spAutoFit/>
+          </a:bodyPr>
+          <a:lstStyle/>
+          <a:p>
+            <a:r>
+              <a:rPr sz="1500" b="1">
+                <a:solidFill>
+                  <a:srgbClr val="000000"/>
+                </a:solidFill>
+                <a:latin typeface="Arial"/>
+              </a:rPr>
+              <a:t>7. £300 compound interest at 10%, 2 yrs?   </a:t>
+            </a:r>
+            <a:r>
+              <a:rPr sz="1500" b="1">
+                <a:solidFill>
+                  <a:srgbClr val="2B6B3D"/>
+                </a:solidFill>
+                <a:latin typeface="Arial"/>
+              </a:rPr>
+              <a:t>£363</a:t>
+            </a:r>
+          </a:p>
+        </p:txBody>
+      </p:sp>
+      <p:sp>
+        <p:nvSpPr>
+          <p:cNvPr id="18" name="TextBox 17"/>
+          <p:cNvSpPr txBox="1"/>
+          <p:nvPr/>
+        </p:nvSpPr>
+        <p:spPr>
+          <a:xfrm>
+            <a:off x="6284495" y="3140000"/>
+            <a:ext cx="5450000" cy="330000"/>
+          </a:xfrm>
+          <a:prstGeom prst="rect">
+            <a:avLst/>
+          </a:prstGeom>
+          <a:noFill/>
+        </p:spPr>
+        <p:txBody>
+          <a:bodyPr wrap="square">
+            <a:spAutoFit/>
+          </a:bodyPr>
+          <a:lstStyle/>
+          <a:p>
+            <a:r>
+              <a:rPr sz="1500" b="1">
+                <a:solidFill>
+                  <a:srgbClr val="000000"/>
+                </a:solidFill>
+                <a:latin typeface="Arial"/>
+              </a:rPr>
+              <a:t>8. 27 out of 36 as a %?   </a:t>
+            </a:r>
+            <a:r>
+              <a:rPr sz="1500" b="1">
+                <a:solidFill>
+                  <a:srgbClr val="2B6B3D"/>
+                </a:solidFill>
+                <a:latin typeface="Arial"/>
+              </a:rPr>
+              <a:t>75%</a:t>
+            </a:r>
+          </a:p>
+        </p:txBody>
+      </p:sp>
+      <p:sp>
+        <p:nvSpPr>
+          <p:cNvPr id="19" name="TextBox 18"/>
+          <p:cNvSpPr txBox="1"/>
+          <p:nvPr/>
+        </p:nvSpPr>
+        <p:spPr>
+          <a:xfrm>
+            <a:off x="457200" y="3620000"/>
+            <a:ext cx="11277295" cy="400000"/>
+          </a:xfrm>
+          <a:prstGeom prst="rect">
+            <a:avLst/>
+          </a:prstGeom>
+          <a:noFill/>
+        </p:spPr>
+        <p:txBody>
+          <a:bodyPr wrap="square">
             <a:spAutoFit/>
           </a:bodyPr>
           <a:lstStyle/>
           <a:p>
             <a:pPr algn="l"/>
             <a:r>
-              <a:rPr sz="1500" b="1" i="0">
+              <a:rPr sz="1600" b="1" i="0">
                 <a:solidFill>
                   <a:srgbClr val="000000"/>
                 </a:solidFill>
                 <a:latin typeface="Arial"/>
               </a:rPr>
-              <a:t>2. 3x + 7 = 1   </a:t>
-            </a:r>
-            <a:r>
-              <a:rPr sz="1500" b="1" i="0">
-                <a:solidFill>
-                  <a:srgbClr val="2B6B3D"/>
-                </a:solidFill>
-                <a:latin typeface="Arial"/>
-              </a:rPr>
-              <a:t>two-step; x = -2</a:t>
-            </a:r>
-          </a:p>
-        </p:txBody>
-      </p:sp>
-      <p:sp>
-        <p:nvSpPr>
-          <p:cNvPr id="8" name="TextBox 7"/>
-          <p:cNvSpPr txBox="1"/>
-          <p:nvPr/>
-        </p:nvSpPr>
-        <p:spPr>
-          <a:xfrm>
-            <a:off x="457200" y="3817619"/>
-            <a:ext cx="5455767" cy="971550"/>
-          </a:xfrm>
-          <a:prstGeom prst="rect">
-            <a:avLst/>
-          </a:prstGeom>
-          <a:noFill/>
-        </p:spPr>
-        <p:txBody>
-          <a:bodyPr wrap="square" anchor="ctr" lIns="0" rIns="0" tIns="0" bIns="0">
-            <a:spAutoFit/>
-          </a:bodyPr>
-          <a:lstStyle/>
-          <a:p>
-            <a:pPr algn="l"/>
-            <a:r>
-              <a:rPr sz="1500" b="1" i="0">
-                <a:solidFill>
-                  <a:srgbClr val="000000"/>
-                </a:solidFill>
-                <a:latin typeface="Arial"/>
-              </a:rPr>
-              <a:t>3. 2(x + 4) = 18   </a:t>
-            </a:r>
-            <a:r>
-              <a:rPr sz="1500" b="1" i="0">
-                <a:solidFill>
-                  <a:srgbClr val="2B6B3D"/>
-                </a:solidFill>
-                <a:latin typeface="Arial"/>
-              </a:rPr>
-              <a:t>bracket; x = 5</a:t>
-            </a:r>
-          </a:p>
-        </p:txBody>
-      </p:sp>
-      <p:sp>
-        <p:nvSpPr>
-          <p:cNvPr id="9" name="TextBox 8"/>
-          <p:cNvSpPr txBox="1"/>
-          <p:nvPr/>
-        </p:nvSpPr>
-        <p:spPr>
-          <a:xfrm>
-            <a:off x="457200" y="4789169"/>
-            <a:ext cx="5455767" cy="971550"/>
-          </a:xfrm>
-          <a:prstGeom prst="rect">
-            <a:avLst/>
-          </a:prstGeom>
-          <a:noFill/>
-        </p:spPr>
-        <p:txBody>
-          <a:bodyPr wrap="square" anchor="ctr" lIns="0" rIns="0" tIns="0" bIns="0">
-            <a:spAutoFit/>
-          </a:bodyPr>
-          <a:lstStyle/>
-          <a:p>
-            <a:pPr algn="l"/>
-            <a:r>
-              <a:rPr sz="1500" b="1" i="0">
-                <a:solidFill>
-                  <a:srgbClr val="000000"/>
-                </a:solidFill>
-                <a:latin typeface="Arial"/>
-              </a:rPr>
-              <a:t>4. x + 11 = -3   </a:t>
-            </a:r>
-            <a:r>
-              <a:rPr sz="1500" b="1" i="0">
-                <a:solidFill>
-                  <a:srgbClr val="2B6B3D"/>
-                </a:solidFill>
-                <a:latin typeface="Arial"/>
-              </a:rPr>
-              <a:t>one-step; x = -14</a:t>
-            </a:r>
-          </a:p>
-        </p:txBody>
-      </p:sp>
-      <p:sp>
-        <p:nvSpPr>
-          <p:cNvPr id="10" name="TextBox 9"/>
-          <p:cNvSpPr txBox="1"/>
-          <p:nvPr/>
-        </p:nvSpPr>
-        <p:spPr>
-          <a:xfrm>
-            <a:off x="6278727" y="1874519"/>
-            <a:ext cx="5455767" cy="971550"/>
-          </a:xfrm>
-          <a:prstGeom prst="rect">
-            <a:avLst/>
-          </a:prstGeom>
-          <a:noFill/>
-        </p:spPr>
-        <p:txBody>
-          <a:bodyPr wrap="square" anchor="ctr" lIns="0" rIns="0" tIns="0" bIns="0">
-            <a:spAutoFit/>
-          </a:bodyPr>
-          <a:lstStyle/>
-          <a:p>
-            <a:pPr algn="l"/>
-            <a:r>
-              <a:rPr sz="1500" b="1" i="0">
-                <a:solidFill>
-                  <a:srgbClr val="000000"/>
-                </a:solidFill>
-                <a:latin typeface="Arial"/>
-              </a:rPr>
-              <a:t>5. 5x − 9 = 16   </a:t>
-            </a:r>
-            <a:r>
-              <a:rPr sz="1500" b="1" i="0">
-                <a:solidFill>
-                  <a:srgbClr val="2B6B3D"/>
-                </a:solidFill>
-                <a:latin typeface="Arial"/>
-              </a:rPr>
-              <a:t>two-step; x = 5</a:t>
-            </a:r>
-          </a:p>
-        </p:txBody>
-      </p:sp>
-      <p:sp>
-        <p:nvSpPr>
-          <p:cNvPr id="11" name="TextBox 10"/>
-          <p:cNvSpPr txBox="1"/>
-          <p:nvPr/>
-        </p:nvSpPr>
-        <p:spPr>
-          <a:xfrm>
-            <a:off x="6278727" y="2846069"/>
-            <a:ext cx="5455767" cy="971550"/>
-          </a:xfrm>
-          <a:prstGeom prst="rect">
-            <a:avLst/>
-          </a:prstGeom>
-          <a:noFill/>
-        </p:spPr>
-        <p:txBody>
-          <a:bodyPr wrap="square" anchor="ctr" lIns="0" rIns="0" tIns="0" bIns="0">
-            <a:spAutoFit/>
-          </a:bodyPr>
-          <a:lstStyle/>
-          <a:p>
-            <a:pPr algn="l"/>
-            <a:r>
-              <a:rPr sz="1500" b="1" i="0">
-                <a:solidFill>
-                  <a:srgbClr val="000000"/>
-                </a:solidFill>
-                <a:latin typeface="Arial"/>
-              </a:rPr>
-              <a:t>6. 4(x − 3) = 8   </a:t>
-            </a:r>
-            <a:r>
-              <a:rPr sz="1500" b="1" i="0">
-                <a:solidFill>
-                  <a:srgbClr val="2B6B3D"/>
-                </a:solidFill>
-                <a:latin typeface="Arial"/>
-              </a:rPr>
-              <a:t>bracket; x = 5</a:t>
-            </a:r>
-          </a:p>
-        </p:txBody>
-      </p:sp>
-      <p:sp>
-        <p:nvSpPr>
-          <p:cNvPr id="12" name="TextBox 11"/>
-          <p:cNvSpPr txBox="1"/>
-          <p:nvPr/>
-        </p:nvSpPr>
-        <p:spPr>
-          <a:xfrm>
-            <a:off x="6278727" y="3817619"/>
-            <a:ext cx="5455767" cy="971550"/>
-          </a:xfrm>
-          <a:prstGeom prst="rect">
-            <a:avLst/>
-          </a:prstGeom>
-          <a:noFill/>
-        </p:spPr>
-        <p:txBody>
-          <a:bodyPr wrap="square" anchor="ctr" lIns="0" rIns="0" tIns="0" bIns="0">
-            <a:spAutoFit/>
-          </a:bodyPr>
-          <a:lstStyle/>
-          <a:p>
-            <a:pPr algn="l"/>
-            <a:r>
-              <a:rPr sz="1500" b="1" i="0">
-                <a:solidFill>
-                  <a:srgbClr val="000000"/>
-                </a:solidFill>
-                <a:latin typeface="Arial"/>
-              </a:rPr>
-              <a:t>7. 6x = -54   </a:t>
-            </a:r>
-            <a:r>
-              <a:rPr sz="1500" b="1" i="0">
-                <a:solidFill>
-                  <a:srgbClr val="2B6B3D"/>
-                </a:solidFill>
-                <a:latin typeface="Arial"/>
-              </a:rPr>
-              <a:t>one-step; x = -9</a:t>
-            </a:r>
-          </a:p>
-        </p:txBody>
-      </p:sp>
-      <p:sp>
-        <p:nvSpPr>
-          <p:cNvPr id="13" name="TextBox 12"/>
-          <p:cNvSpPr txBox="1"/>
-          <p:nvPr/>
-        </p:nvSpPr>
-        <p:spPr>
-          <a:xfrm>
-            <a:off x="6278727" y="4789169"/>
-            <a:ext cx="5455767" cy="971550"/>
-          </a:xfrm>
-          <a:prstGeom prst="rect">
-            <a:avLst/>
-          </a:prstGeom>
-          <a:noFill/>
-        </p:spPr>
-        <p:txBody>
-          <a:bodyPr wrap="square" anchor="ctr" lIns="0" rIns="0" tIns="0" bIns="0">
-            <a:spAutoFit/>
-          </a:bodyPr>
-          <a:lstStyle/>
-          <a:p>
-            <a:pPr algn="l"/>
-            <a:r>
-              <a:rPr sz="1500" b="1" i="0">
-                <a:solidFill>
-                  <a:srgbClr val="000000"/>
-                </a:solidFill>
-                <a:latin typeface="Arial"/>
-              </a:rPr>
-              <a:t>8. -3(x + 2) = -9   </a:t>
-            </a:r>
-            <a:r>
-              <a:rPr sz="1500" b="1" i="0">
-                <a:solidFill>
-                  <a:srgbClr val="2B6B3D"/>
-                </a:solidFill>
-                <a:latin typeface="Arial"/>
-              </a:rPr>
-              <a:t>bracket; x = 1</a:t>
-            </a:r>
-          </a:p>
-        </p:txBody>
-      </p:sp>
-      <p:sp>
-        <p:nvSpPr>
-          <p:cNvPr id="14" name="Rounded Rectangle 13"/>
-          <p:cNvSpPr/>
-          <p:nvPr/>
-        </p:nvSpPr>
-        <p:spPr>
-          <a:xfrm>
-            <a:off x="457200" y="5897880"/>
-            <a:ext cx="11277295" cy="548640"/>
-          </a:xfrm>
-          <a:prstGeom prst="roundRect">
-            <a:avLst/>
-          </a:prstGeom>
-          <a:solidFill>
-            <a:srgbClr val="F2F2F2"/>
-          </a:solidFill>
-          <a:ln w="9525">
-            <a:solidFill>
-              <a:srgbClr val="CCCCCC"/>
-            </a:solidFill>
-          </a:ln>
-          <a:effectLst/>
-        </p:spPr>
-        <p:style>
-          <a:lnRef idx="1">
-            <a:schemeClr val="accent1"/>
-          </a:lnRef>
-          <a:fillRef idx="3">
-            <a:schemeClr val="accent1"/>
-          </a:fillRef>
-          <a:effectRef idx="2">
-            <a:schemeClr val="accent1"/>
-          </a:effectRef>
-          <a:fontRef idx="minor">
-            <a:schemeClr val="lt1"/>
-          </a:fontRef>
-        </p:style>
-        <p:txBody>
-          <a:bodyPr rtlCol="0" anchor="ctr" wrap="square" lIns="274320" rIns="274320"/>
-          <a:lstStyle/>
-          <a:p>
-            <a:pPr algn="ctr"/>
-            <a:r>
-              <a:rPr sz="1600" b="1" i="0">
-                <a:solidFill>
-                  <a:srgbClr val="000000"/>
-                </a:solidFill>
-                <a:latin typeface="Arial"/>
-              </a:rPr>
-              <a:t>Exit check: Solve 3(x + 4) = 6 and check your answer.</a:t>
-            </a:r>
-          </a:p>
-        </p:txBody>
-      </p:sp>
-      <p:sp>
-        <p:nvSpPr>
-          <p:cNvPr id="15" name="TextBox 14"/>
+              <a:t>Exit check: Which of today's problems needed a reverse percentage? How could you tell?</a:t>
+            </a:r>
+          </a:p>
+        </p:txBody>
+      </p:sp>
+      <p:sp>
+        <p:nvSpPr>
+          <p:cNvPr id="20" name="TextBox 19"/>
           <p:cNvSpPr txBox="1"/>
           <p:nvPr/>
         </p:nvSpPr>
@@ -6951,19 +6825,12 @@
           <a:noFill/>
         </p:spPr>
         <p:txBody>
-          <a:bodyPr wrap="square" anchor="t" lIns="0" rIns="0" tIns="0" bIns="0">
-            <a:spAutoFit/>
-          </a:bodyPr>
-          <a:lstStyle/>
-          <a:p>
-            <a:pPr algn="l">
-              <a:spcBef>
-                <a:spcPts val="0"/>
-              </a:spcBef>
-              <a:spcAft>
-                <a:spcPts val="800"/>
-              </a:spcAft>
-            </a:pPr>
+          <a:bodyPr wrap="square">
+            <a:spAutoFit/>
+          </a:bodyPr>
+          <a:lstStyle/>
+          <a:p>
+            <a:pPr algn="l"/>
             <a:r>
               <a:rPr sz="1100" b="0" i="0">
                 <a:solidFill>
@@ -6971,7 +6838,7 @@
                 </a:solidFill>
                 <a:latin typeface="Arial"/>
               </a:rPr>
-              <a:t>Y8 Solving Linear Equations — Lower-to-Middle Set</a:t>
+              <a:t>Y8 Percentages and Proportionality — Middle Set</a:t>
             </a:r>
           </a:p>
         </p:txBody>
